--- a/output/presentation/SafeHome_AI_Video_Slides_and_Recording_Plan.pptx
+++ b/output/presentation/SafeHome_AI_Video_Slides_and_Recording_Plan.pptx
@@ -2,18 +2,18 @@
 <file path=ppt/presentation.xml><?xml version="1.0" encoding="utf-8"?>
 <p:presentation xmlns:p="http://schemas.openxmlformats.org/presentationml/2006/main">
   <p:sldMasterIdLst>
-    <p:sldMasterId xmlns:r="http://schemas.openxmlformats.org/officeDocument/2006/relationships" id="2147483648" r:id="R40c6641c009f4698"/>
+    <p:sldMasterId xmlns:r="http://schemas.openxmlformats.org/officeDocument/2006/relationships" id="2147483648" r:id="R8e9ca8c9012644dc"/>
   </p:sldMasterIdLst>
   <p:notesMasterIdLst>
-    <p:notesMasterId xmlns:r="http://schemas.openxmlformats.org/officeDocument/2006/relationships" r:id="R0cf758d5acf64986"/>
+    <p:notesMasterId xmlns:r="http://schemas.openxmlformats.org/officeDocument/2006/relationships" r:id="R503524f676044d01"/>
   </p:notesMasterIdLst>
   <p:sldIdLst>
-    <p:sldId xmlns:r="http://schemas.openxmlformats.org/officeDocument/2006/relationships" id="256" r:id="R8a03777603264b29"/>
-    <p:sldId xmlns:r="http://schemas.openxmlformats.org/officeDocument/2006/relationships" id="257" r:id="R3947f8d3b7e54811"/>
-    <p:sldId xmlns:r="http://schemas.openxmlformats.org/officeDocument/2006/relationships" id="258" r:id="Rcb42e5a754c54311"/>
-    <p:sldId xmlns:r="http://schemas.openxmlformats.org/officeDocument/2006/relationships" id="259" r:id="R4cce97b1331449ff"/>
-    <p:sldId xmlns:r="http://schemas.openxmlformats.org/officeDocument/2006/relationships" id="260" r:id="R60366e3d23664c90"/>
-    <p:sldId xmlns:r="http://schemas.openxmlformats.org/officeDocument/2006/relationships" id="261" r:id="Reaea455dab7342a0"/>
+    <p:sldId xmlns:r="http://schemas.openxmlformats.org/officeDocument/2006/relationships" id="256" r:id="R82fcfcd37c0f4899"/>
+    <p:sldId xmlns:r="http://schemas.openxmlformats.org/officeDocument/2006/relationships" id="257" r:id="Rd9b9a75ea12a4b8f"/>
+    <p:sldId xmlns:r="http://schemas.openxmlformats.org/officeDocument/2006/relationships" id="258" r:id="Ra7d5ca0e93b04b76"/>
+    <p:sldId xmlns:r="http://schemas.openxmlformats.org/officeDocument/2006/relationships" id="259" r:id="Rccae3232dece4ed4"/>
+    <p:sldId xmlns:r="http://schemas.openxmlformats.org/officeDocument/2006/relationships" id="260" r:id="R4db9dbbe5bd446a1"/>
+    <p:sldId xmlns:r="http://schemas.openxmlformats.org/officeDocument/2006/relationships" id="261" r:id="Rddec66ace5734537"/>
   </p:sldIdLst>
   <p:sldSz cx="12192000" cy="6858000"/>
   <p:notesSz cx="6858000" cy="9144000"/>
@@ -452,7 +452,7 @@
           </a:p>
           <a:p xmlns:a="http://schemas.openxmlformats.org/drawingml/2006/main">
             <a:r>
-              <a:t>0:00-0:08 (8 seconds)</a:t>
+              <a:t>0:00-0:12 (12 seconds)</a:t>
             </a:r>
           </a:p>
           <a:p xmlns:a="http://schemas.openxmlformats.org/drawingml/2006/main">
@@ -467,7 +467,7 @@
           </a:p>
           <a:p xmlns:a="http://schemas.openxmlformats.org/drawingml/2006/main">
             <a:r>
-              <a:t>I built SafeHome AI to help older adults and families find room hazards before those hazards become accidents.</a:t>
+              <a:t>Imagine an older adult walking through a familiar bedroom at night. A cord or shirt on the floor is easy to overlook. SafeHome AI turns one room photo into a simple plan for what to fix first.</a:t>
             </a:r>
           </a:p>
           <a:p xmlns:a="http://schemas.openxmlformats.org/drawingml/2006/main">
@@ -482,7 +482,7 @@
           </a:p>
           <a:p xmlns:a="http://schemas.openxmlformats.org/drawingml/2006/main">
             <a:r>
-              <a:t>0:08-0:33 - Clip A: Start a Quick Safety Check, choose a room, upload a photo, and begin analysis. Narration: A first check does not require an account. The user chooses a room, uploads one photo, and the app checks image quality before analysis.</a:t>
+              <a:t>0:12-0:32 - Clip A: Use two prepared shots. First show room selection. Cut to the uploaded photo and begin analysis.</a:t>
             </a:r>
           </a:p>
         </p:txBody>
@@ -557,7 +557,7 @@
           </a:p>
           <a:p xmlns:a="http://schemas.openxmlformats.org/drawingml/2006/main">
             <a:r>
-              <a:t>0:33-0:45 (12 seconds)</a:t>
+              <a:t>0:32-0:44 (12 seconds)</a:t>
             </a:r>
           </a:p>
           <a:p xmlns:a="http://schemas.openxmlformats.org/drawingml/2006/main">
@@ -572,7 +572,7 @@
           </a:p>
           <a:p xmlns:a="http://schemas.openxmlformats.org/drawingml/2006/main">
             <a:r>
-              <a:t>Quick Check removes setup from the first experience. An account uses the same analysis, then adds Room Names, history, comparisons, trends, and sharing.</a:t>
+              <a:t>Quick Check gets someone to an answer quickly. Signing in keeps the same check, then adds saved rooms, progress, comparisons, and sharing.</a:t>
             </a:r>
           </a:p>
           <a:p xmlns:a="http://schemas.openxmlformats.org/drawingml/2006/main">
@@ -587,7 +587,7 @@
           </a:p>
           <a:p xmlns:a="http://schemas.openxmlformats.org/drawingml/2006/main">
             <a:r>
-              <a:t>0:45-1:20 - Clip B: Show the marked photo, two hazard cards, answer follow-up questions, and reveal the score. Narration: Numbered markers connect visible evidence to plain-language explanations. Questions cover important details the photo cannot prove, and the result ends with a bounded room score.</a:t>
+              <a:t>0:44-1:14 - Clip B: Use three prepared shots: marked evidence, one follow-up question, and the completed score.</a:t>
             </a:r>
           </a:p>
         </p:txBody>
@@ -662,7 +662,7 @@
           </a:p>
           <a:p xmlns:a="http://schemas.openxmlformats.org/drawingml/2006/main">
             <a:r>
-              <a:t>1:20-1:32 (12 seconds)</a:t>
+              <a:t>1:14-1:30 (16 seconds)</a:t>
             </a:r>
           </a:p>
           <a:p xmlns:a="http://schemas.openxmlformats.org/drawingml/2006/main">
@@ -677,7 +677,7 @@
           </a:p>
           <a:p xmlns:a="http://schemas.openxmlformats.org/drawingml/2006/main">
             <a:r>
-              <a:t>A Streamlit upload passes through image-quality checks and OpenAI Vision. Python rules validate the returned JSON, clamp every hazard to one through fifteen points, and create questions for uncertainty. Supabase stores accounts and structured check history, Brevo sends reset codes and text summaries, and room photos remain only in the active session.</a:t>
+              <a:t>The photo passes an image-quality gate before Vision AI reviews visible evidence. Python validates the result and controls the score. Supabase stores structured history, Brevo sends text summaries, and the room photo stays in the active session.</a:t>
             </a:r>
           </a:p>
           <a:p xmlns:a="http://schemas.openxmlformats.org/drawingml/2006/main">
@@ -692,7 +692,7 @@
           </a:p>
           <a:p xmlns:a="http://schemas.openxmlformats.org/drawingml/2006/main">
             <a:r>
-              <a:t>1:32-1:57 - Clip C: Show the three-step safety plan, then compare a second photo after fixes. Narration: The result becomes a short action plan. A later photo shows which hazard categories were resolved, which remain, and whether anything new appeared.</a:t>
+              <a:t>1:30-1:50 - Clip C: Use two prepared shots: the safety plan and the completed before-and-after comparison.</a:t>
             </a:r>
           </a:p>
         </p:txBody>
@@ -767,7 +767,7 @@
           </a:p>
           <a:p xmlns:a="http://schemas.openxmlformats.org/drawingml/2006/main">
             <a:r>
-              <a:t>1:57-2:09 (12 seconds)</a:t>
+              <a:t>1:50-2:05 (15 seconds)</a:t>
             </a:r>
           </a:p>
           <a:p xmlns:a="http://schemas.openxmlformats.org/drawingml/2006/main">
@@ -782,7 +782,7 @@
           </a:p>
           <a:p xmlns:a="http://schemas.openxmlformats.org/drawingml/2006/main">
             <a:r>
-              <a:t>Each visible hazard receives one to fifteen points. Follow-up answers add evidence, skipped questions can add a limited buffer, and the final room score stays capped at one hundred.</a:t>
+              <a:t>Each visible hazard receives one to fifteen points. Follow-up answers add only what the photo cannot establish. Tested fallback values limit variation, and the final room score never exceeds one hundred.</a:t>
             </a:r>
           </a:p>
         </p:txBody>
@@ -857,7 +857,7 @@
           </a:p>
           <a:p xmlns:a="http://schemas.openxmlformats.org/drawingml/2006/main">
             <a:r>
-              <a:t>2:09-2:21 (12 seconds)</a:t>
+              <a:t>2:05-2:20 (15 seconds)</a:t>
             </a:r>
           </a:p>
           <a:p xmlns:a="http://schemas.openxmlformats.org/drawingml/2006/main">
@@ -872,7 +872,7 @@
           </a:p>
           <a:p xmlns:a="http://schemas.openxmlformats.org/drawingml/2006/main">
             <a:r>
-              <a:t>I tested ten staged room images containing thirty-five reference hazards. SafeHome AI correctly reported thirty-four and missed one, for a ninety-seven point one percent detection rate.</a:t>
+              <a:t>I tested ten staged room photos with thirty-five reference hazards. SafeHome AI reported thirty-four correctly and missed one. This is a focused test set, not a guarantee, so human review remains part of the app.</a:t>
             </a:r>
           </a:p>
           <a:p xmlns:a="http://schemas.openxmlformats.org/drawingml/2006/main">
@@ -887,7 +887,7 @@
           </a:p>
           <a:p xmlns:a="http://schemas.openxmlformats.org/drawingml/2006/main">
             <a:r>
-              <a:t>2:21-2:46 - Clip D: Show the room dashboard, score trend, before-and-after comparison, add an email recipient, and briefly open Accessibility. Narration: Saved checks track progress by room. The dashboard shows trends and comparisons, summaries can go to trusted people, and accessibility controls remain available throughout the app.</a:t>
+              <a:t>2:20-2:45 - Clip D: Use three prepared shots: dashboard and trend, add a recipient field, and Accessibility.</a:t>
             </a:r>
           </a:p>
         </p:txBody>
@@ -962,7 +962,7 @@
           </a:p>
           <a:p xmlns:a="http://schemas.openxmlformats.org/drawingml/2006/main">
             <a:r>
-              <a:t>2:46-3:00 (14 seconds)</a:t>
+              <a:t>2:45-3:00 (15 seconds)</a:t>
             </a:r>
           </a:p>
           <a:p xmlns:a="http://schemas.openxmlformats.org/drawingml/2006/main">
@@ -977,7 +977,7 @@
           </a:p>
           <a:p xmlns:a="http://schemas.openxmlformats.org/drawingml/2006/main">
             <a:r>
-              <a:t>SafeHome AI is designed around consistency, uncertainty, action, and access. Python rules stabilize the score, follow-up questions prevent hidden assumptions, results become trackable fixes, and accessibility remains available throughout. The app supports room decisions without diagnosing a person or guaranteeing safety.</a:t>
+              <a:t>The story ends where it began: in the same room, with fewer unknowns and a clear next step. SafeHome AI combines controlled scoring, honest uncertainty, practical action, and accessible design while keeping human judgment explicit.</a:t>
             </a:r>
           </a:p>
         </p:txBody>
@@ -1024,7 +1024,7 @@
           <p:cNvPr id="3" name="Title">
             <a:extLst xmlns:a="http://schemas.openxmlformats.org/drawingml/2006/main">
               <a:ext uri="{FF2B5EF4-FFF2-40B4-BE49-F238E27FC236}">
-                <a16:creationId xmlns:a16="http://schemas.microsoft.com/office/drawing/2014/main" id="{5E183E86-50F4-4799-B3DA-853A4313157A}"/>
+                <a16:creationId xmlns:a16="http://schemas.microsoft.com/office/drawing/2014/main" id="{F00D85D1-BE8D-40B0-B74D-0D021A950A8D}"/>
               </a:ext>
             </a:extLst>
           </p:cNvPr>
@@ -1181,7 +1181,7 @@
           <p:cNvPr id="2" name="Subtitle">
             <a:extLst xmlns:a="http://schemas.openxmlformats.org/drawingml/2006/main">
               <a:ext uri="{FF2B5EF4-FFF2-40B4-BE49-F238E27FC236}">
-                <a16:creationId xmlns:a16="http://schemas.microsoft.com/office/drawing/2014/main" id="{CBDCC246-00D7-45C8-A2C0-AADF799FD049}"/>
+                <a16:creationId xmlns:a16="http://schemas.microsoft.com/office/drawing/2014/main" id="{0159599A-4A3D-46E0-91A6-FF31A283938C}"/>
               </a:ext>
             </a:extLst>
           </p:cNvPr>
@@ -1355,7 +1355,7 @@
           <p:cNvPr id="2" name="Section title">
             <a:extLst xmlns:a="http://schemas.openxmlformats.org/drawingml/2006/main">
               <a:ext uri="{FF2B5EF4-FFF2-40B4-BE49-F238E27FC236}">
-                <a16:creationId xmlns:a16="http://schemas.microsoft.com/office/drawing/2014/main" id="{DA59B34E-3A9F-4F68-B8D0-94467F223EC8}"/>
+                <a16:creationId xmlns:a16="http://schemas.microsoft.com/office/drawing/2014/main" id="{67F76045-6284-4D3C-AF57-31FD8719A44B}"/>
               </a:ext>
             </a:extLst>
           </p:cNvPr>
@@ -1529,7 +1529,7 @@
           <p:cNvPr id="3" name="Title">
             <a:extLst xmlns:a="http://schemas.openxmlformats.org/drawingml/2006/main">
               <a:ext uri="{FF2B5EF4-FFF2-40B4-BE49-F238E27FC236}">
-                <a16:creationId xmlns:a16="http://schemas.microsoft.com/office/drawing/2014/main" id="{68B38518-C414-4DDE-B74A-5EBA276A6C41}"/>
+                <a16:creationId xmlns:a16="http://schemas.microsoft.com/office/drawing/2014/main" id="{5AFA1B96-5560-4F8E-B3C3-91414219BB48}"/>
               </a:ext>
             </a:extLst>
           </p:cNvPr>
@@ -1686,7 +1686,7 @@
           <p:cNvPr id="2" name="Body">
             <a:extLst xmlns:a="http://schemas.openxmlformats.org/drawingml/2006/main">
               <a:ext uri="{FF2B5EF4-FFF2-40B4-BE49-F238E27FC236}">
-                <a16:creationId xmlns:a16="http://schemas.microsoft.com/office/drawing/2014/main" id="{D82CE15F-E273-4845-8AD0-B670989918DB}"/>
+                <a16:creationId xmlns:a16="http://schemas.microsoft.com/office/drawing/2014/main" id="{B3695E1B-041F-4915-A4F4-5AF6204CCDA8}"/>
               </a:ext>
             </a:extLst>
           </p:cNvPr>
@@ -1860,7 +1860,7 @@
           <p:cNvPr id="4" name="Title">
             <a:extLst xmlns:a="http://schemas.openxmlformats.org/drawingml/2006/main">
               <a:ext uri="{FF2B5EF4-FFF2-40B4-BE49-F238E27FC236}">
-                <a16:creationId xmlns:a16="http://schemas.microsoft.com/office/drawing/2014/main" id="{C23CF8E3-9181-40FD-B8F5-308C85F02E20}"/>
+                <a16:creationId xmlns:a16="http://schemas.microsoft.com/office/drawing/2014/main" id="{B4876C32-E8FB-439B-B850-FEC827CAE8D4}"/>
               </a:ext>
             </a:extLst>
           </p:cNvPr>
@@ -2017,7 +2017,7 @@
           <p:cNvPr id="2" name="Left column">
             <a:extLst xmlns:a="http://schemas.openxmlformats.org/drawingml/2006/main">
               <a:ext uri="{FF2B5EF4-FFF2-40B4-BE49-F238E27FC236}">
-                <a16:creationId xmlns:a16="http://schemas.microsoft.com/office/drawing/2014/main" id="{F5EC88D5-53D2-4AF2-9427-3A5213D9D318}"/>
+                <a16:creationId xmlns:a16="http://schemas.microsoft.com/office/drawing/2014/main" id="{55B2800D-B621-44CC-90B4-F0B70934ECAA}"/>
               </a:ext>
             </a:extLst>
           </p:cNvPr>
@@ -2174,7 +2174,7 @@
           <p:cNvPr id="3" name="Right column">
             <a:extLst xmlns:a="http://schemas.openxmlformats.org/drawingml/2006/main">
               <a:ext uri="{FF2B5EF4-FFF2-40B4-BE49-F238E27FC236}">
-                <a16:creationId xmlns:a16="http://schemas.microsoft.com/office/drawing/2014/main" id="{77518EA7-89E9-46EC-A971-5743ADCC0B91}"/>
+                <a16:creationId xmlns:a16="http://schemas.microsoft.com/office/drawing/2014/main" id="{1EE86453-BEC5-4574-8E54-BC8008B69000}"/>
               </a:ext>
             </a:extLst>
           </p:cNvPr>
@@ -2348,7 +2348,7 @@
           <p:cNvPr id="3" name="Title">
             <a:extLst xmlns:a="http://schemas.openxmlformats.org/drawingml/2006/main">
               <a:ext uri="{FF2B5EF4-FFF2-40B4-BE49-F238E27FC236}">
-                <a16:creationId xmlns:a16="http://schemas.microsoft.com/office/drawing/2014/main" id="{FC3A47F0-8536-4E15-ADA3-2D6C10C4B029}"/>
+                <a16:creationId xmlns:a16="http://schemas.microsoft.com/office/drawing/2014/main" id="{AFD03C99-BAC9-463F-92D0-B170DD77B572}"/>
               </a:ext>
             </a:extLst>
           </p:cNvPr>
@@ -2505,7 +2505,7 @@
           <p:cNvPr id="2" name="Left column">
             <a:extLst xmlns:a="http://schemas.openxmlformats.org/drawingml/2006/main">
               <a:ext uri="{FF2B5EF4-FFF2-40B4-BE49-F238E27FC236}">
-                <a16:creationId xmlns:a16="http://schemas.microsoft.com/office/drawing/2014/main" id="{70AEE0A5-0770-44F1-8291-5E810C3883F7}"/>
+                <a16:creationId xmlns:a16="http://schemas.microsoft.com/office/drawing/2014/main" id="{58AB202B-8F43-4EA9-A8B8-5CE5634C0AB5}"/>
               </a:ext>
             </a:extLst>
           </p:cNvPr>
@@ -2700,12 +2700,12 @@
   </p:cSld>
   <p:clrMap bg1="lt1" tx1="dk1" bg2="lt2" tx2="dk2" accent1="accent1" accent2="accent2" accent3="accent3" accent4="accent4" accent5="accent5" accent6="accent6" hlink="hlink" folHlink="folHlink"/>
   <p:sldLayoutIdLst>
-    <p:sldLayoutId xmlns:r="http://schemas.openxmlformats.org/officeDocument/2006/relationships" id="2147483649" r:id="Rfbae5a2bd7f447dc"/>
-    <p:sldLayoutId xmlns:r="http://schemas.openxmlformats.org/officeDocument/2006/relationships" id="2147483650" r:id="R8acd94c216554ad6"/>
-    <p:sldLayoutId xmlns:r="http://schemas.openxmlformats.org/officeDocument/2006/relationships" id="2147483651" r:id="Rec70543560e849a0"/>
-    <p:sldLayoutId xmlns:r="http://schemas.openxmlformats.org/officeDocument/2006/relationships" id="2147483652" r:id="Rf784712dd2234256"/>
-    <p:sldLayoutId xmlns:r="http://schemas.openxmlformats.org/officeDocument/2006/relationships" id="2147483653" r:id="R6d61811cce8d4551"/>
-    <p:sldLayoutId xmlns:r="http://schemas.openxmlformats.org/officeDocument/2006/relationships" id="2147483654" r:id="R504e0d6d87184df5"/>
+    <p:sldLayoutId xmlns:r="http://schemas.openxmlformats.org/officeDocument/2006/relationships" id="2147483649" r:id="R60006d894bea4bf3"/>
+    <p:sldLayoutId xmlns:r="http://schemas.openxmlformats.org/officeDocument/2006/relationships" id="2147483650" r:id="Rcfd4ee351b6c423e"/>
+    <p:sldLayoutId xmlns:r="http://schemas.openxmlformats.org/officeDocument/2006/relationships" id="2147483651" r:id="R0daf1d35d8b94356"/>
+    <p:sldLayoutId xmlns:r="http://schemas.openxmlformats.org/officeDocument/2006/relationships" id="2147483652" r:id="R354ee04e6a174d53"/>
+    <p:sldLayoutId xmlns:r="http://schemas.openxmlformats.org/officeDocument/2006/relationships" id="2147483653" r:id="Rd95dcc21e640433f"/>
+    <p:sldLayoutId xmlns:r="http://schemas.openxmlformats.org/officeDocument/2006/relationships" id="2147483654" r:id="Rc3b3918468b14a6c"/>
   </p:sldLayoutIdLst>
   <p:txStyles>
     <p:titleStyle>
@@ -3256,7 +3256,7 @@
           <p:cNvPr id="11" name="">
             <a:extLst xmlns:a="http://schemas.openxmlformats.org/drawingml/2006/main">
               <a:ext uri="{FF2B5EF4-FFF2-40B4-BE49-F238E27FC236}">
-                <a16:creationId xmlns:a16="http://schemas.microsoft.com/office/drawing/2014/main" id="{23AAD554-04C3-40C6-A0D1-4997F7CA73B8}"/>
+                <a16:creationId xmlns:a16="http://schemas.microsoft.com/office/drawing/2014/main" id="{C217F1E0-DB9C-4B7C-AF6C-589E30EFE547}"/>
               </a:ext>
             </a:extLst>
           </p:cNvPr>
@@ -3286,7 +3286,7 @@
           <p:cNvPr id="2" name="">
             <a:extLst xmlns:a="http://schemas.openxmlformats.org/drawingml/2006/main">
               <a:ext uri="{FF2B5EF4-FFF2-40B4-BE49-F238E27FC236}">
-                <a16:creationId xmlns:a16="http://schemas.microsoft.com/office/drawing/2014/main" id="{6E7740B8-94E0-4AE8-82C7-18CAF4AB7A4F}"/>
+                <a16:creationId xmlns:a16="http://schemas.microsoft.com/office/drawing/2014/main" id="{6375C62D-BED6-42F3-B67F-383167A617CE}"/>
               </a:ext>
             </a:extLst>
           </p:cNvPr>
@@ -3333,7 +3333,7 @@
                   <a:srgbClr val="203247"/>
                 </a:solidFill>
               </a:rPr>
-              <a:t>A room-safety check</a:t>
+              <a:t>One ordinary room.</a:t>
             </a:r>
           </a:p>
           <a:p xmlns:a="http://schemas.openxmlformats.org/drawingml/2006/main">
@@ -3350,7 +3350,7 @@
                   <a:srgbClr val="203247"/>
                 </a:solidFill>
               </a:rPr>
-              <a:t>from one photo</a:t>
+              <a:t>One overlooked hazard.</a:t>
             </a:r>
           </a:p>
         </p:txBody>
@@ -3360,7 +3360,7 @@
           <p:cNvPr id="3" name="">
             <a:extLst xmlns:a="http://schemas.openxmlformats.org/drawingml/2006/main">
               <a:ext uri="{FF2B5EF4-FFF2-40B4-BE49-F238E27FC236}">
-                <a16:creationId xmlns:a16="http://schemas.microsoft.com/office/drawing/2014/main" id="{D0FA3080-8C4F-4FE8-96B8-DE4BDFFF4909}"/>
+                <a16:creationId xmlns:a16="http://schemas.microsoft.com/office/drawing/2014/main" id="{09194787-A159-497B-BC74-DAF9422982CB}"/>
               </a:ext>
             </a:extLst>
           </p:cNvPr>
@@ -3372,7 +3372,7 @@
         <p:spPr>
           <a:xfrm xmlns:a="http://schemas.openxmlformats.org/drawingml/2006/main">
             <a:off x="628650" y="2838450"/>
-            <a:ext cx="6572250" cy="609600"/>
+            <a:ext cx="6572250" cy="685800"/>
           </a:xfrm>
           <a:prstGeom xmlns:a="http://schemas.openxmlformats.org/drawingml/2006/main" prst="rect">
             <a:avLst/>
@@ -3407,7 +3407,7 @@
                   <a:srgbClr val="59677A"/>
                 </a:solidFill>
               </a:rPr>
-              <a:t>Designed for older adults, families, and anyone helping make a home safer.</a:t>
+              <a:t>SafeHome AI helps an older adult or family member notice the risk and decide what to fix first.</a:t>
             </a:r>
           </a:p>
         </p:txBody>
@@ -3417,7 +3417,7 @@
           <p:cNvPr id="4" name="">
             <a:extLst xmlns:a="http://schemas.openxmlformats.org/drawingml/2006/main">
               <a:ext uri="{FF2B5EF4-FFF2-40B4-BE49-F238E27FC236}">
-                <a16:creationId xmlns:a16="http://schemas.microsoft.com/office/drawing/2014/main" id="{C2EEA11D-1955-4B19-B25E-71F57ADE2892}"/>
+                <a16:creationId xmlns:a16="http://schemas.microsoft.com/office/drawing/2014/main" id="{96F26F4D-F0AA-4FCC-B5FB-10B76C0DAED7}"/>
               </a:ext>
             </a:extLst>
           </p:cNvPr>
@@ -3447,7 +3447,7 @@
           <p:cNvPr id="5" name="">
             <a:extLst xmlns:a="http://schemas.openxmlformats.org/drawingml/2006/main">
               <a:ext uri="{FF2B5EF4-FFF2-40B4-BE49-F238E27FC236}">
-                <a16:creationId xmlns:a16="http://schemas.microsoft.com/office/drawing/2014/main" id="{8108B61E-6CCC-45BB-9505-A00832AB28B5}"/>
+                <a16:creationId xmlns:a16="http://schemas.microsoft.com/office/drawing/2014/main" id="{9E093248-D209-4B84-B224-74E8DACCBD57}"/>
               </a:ext>
             </a:extLst>
           </p:cNvPr>
@@ -3482,7 +3482,7 @@
           <p:cNvPr id="6" name="">
             <a:extLst xmlns:a="http://schemas.openxmlformats.org/drawingml/2006/main">
               <a:ext uri="{FF2B5EF4-FFF2-40B4-BE49-F238E27FC236}">
-                <a16:creationId xmlns:a16="http://schemas.microsoft.com/office/drawing/2014/main" id="{66DED213-A8C0-4156-893D-B143B654F8F5}"/>
+                <a16:creationId xmlns:a16="http://schemas.microsoft.com/office/drawing/2014/main" id="{ED579203-678A-48CD-9F59-DCDAA59CEB13}"/>
               </a:ext>
             </a:extLst>
           </p:cNvPr>
@@ -3539,7 +3539,7 @@
           <p:cNvPr id="7" name="">
             <a:extLst xmlns:a="http://schemas.openxmlformats.org/drawingml/2006/main">
               <a:ext uri="{FF2B5EF4-FFF2-40B4-BE49-F238E27FC236}">
-                <a16:creationId xmlns:a16="http://schemas.microsoft.com/office/drawing/2014/main" id="{D26BF058-BE3E-4B58-9BAF-7A8DE865787D}"/>
+                <a16:creationId xmlns:a16="http://schemas.microsoft.com/office/drawing/2014/main" id="{055D300B-3C65-4BC3-9D83-7D1CAA675DE6}"/>
               </a:ext>
             </a:extLst>
           </p:cNvPr>
@@ -3613,7 +3613,7 @@
           <p:cNvPr id="8" name="">
             <a:extLst xmlns:a="http://schemas.openxmlformats.org/drawingml/2006/main">
               <a:ext uri="{FF2B5EF4-FFF2-40B4-BE49-F238E27FC236}">
-                <a16:creationId xmlns:a16="http://schemas.microsoft.com/office/drawing/2014/main" id="{379778E8-095B-4FE9-ACCC-AEE9AECF474E}"/>
+                <a16:creationId xmlns:a16="http://schemas.microsoft.com/office/drawing/2014/main" id="{FC2E9E2E-DCE9-4DCC-8069-FEDB66C1AA32}"/>
               </a:ext>
             </a:extLst>
           </p:cNvPr>
@@ -3643,7 +3643,7 @@
           <p:cNvPr id="9" name="">
             <a:extLst xmlns:a="http://schemas.openxmlformats.org/drawingml/2006/main">
               <a:ext uri="{FF2B5EF4-FFF2-40B4-BE49-F238E27FC236}">
-                <a16:creationId xmlns:a16="http://schemas.microsoft.com/office/drawing/2014/main" id="{952E934B-F1C1-49A0-99B6-AB32D98F37EA}"/>
+                <a16:creationId xmlns:a16="http://schemas.microsoft.com/office/drawing/2014/main" id="{1B5752D4-A715-4DAF-B8AE-67A20440C728}"/>
               </a:ext>
             </a:extLst>
           </p:cNvPr>
@@ -3700,7 +3700,7 @@
           <p:cNvPr id="10" name="">
             <a:extLst xmlns:a="http://schemas.openxmlformats.org/drawingml/2006/main">
               <a:ext uri="{FF2B5EF4-FFF2-40B4-BE49-F238E27FC236}">
-                <a16:creationId xmlns:a16="http://schemas.microsoft.com/office/drawing/2014/main" id="{967AB5DE-1DA6-46CC-840C-F078AD2B15E2}"/>
+                <a16:creationId xmlns:a16="http://schemas.microsoft.com/office/drawing/2014/main" id="{671919F0-BE57-4F67-8AC9-51359502794C}"/>
               </a:ext>
             </a:extLst>
           </p:cNvPr>
@@ -3755,7 +3755,7 @@
     </p:spTree>
     <p:extLst>
       <p:ext uri="{BB962C8B-B14F-4D97-AF65-F5344CB8AC3E}">
-        <p14:creationId xmlns:p14="http://schemas.microsoft.com/office/powerpoint/2010/main" val="1127421677"/>
+        <p14:creationId xmlns:p14="http://schemas.microsoft.com/office/powerpoint/2010/main" val="522563765"/>
       </p:ext>
     </p:extLst>
   </p:cSld>
@@ -3786,7 +3786,7 @@
           <p:cNvPr id="39" name="">
             <a:extLst xmlns:a="http://schemas.openxmlformats.org/drawingml/2006/main">
               <a:ext uri="{FF2B5EF4-FFF2-40B4-BE49-F238E27FC236}">
-                <a16:creationId xmlns:a16="http://schemas.microsoft.com/office/drawing/2014/main" id="{360DE95D-E832-499E-B2B5-F9AC11444D5C}"/>
+                <a16:creationId xmlns:a16="http://schemas.microsoft.com/office/drawing/2014/main" id="{9B0438C1-A89C-4C9C-8FCD-047589BDE44E}"/>
               </a:ext>
             </a:extLst>
           </p:cNvPr>
@@ -3816,7 +3816,7 @@
           <p:cNvPr id="2" name="">
             <a:extLst xmlns:a="http://schemas.openxmlformats.org/drawingml/2006/main">
               <a:ext uri="{FF2B5EF4-FFF2-40B4-BE49-F238E27FC236}">
-                <a16:creationId xmlns:a16="http://schemas.microsoft.com/office/drawing/2014/main" id="{63EC3A58-EF42-4325-B2BB-363A432C74BF}"/>
+                <a16:creationId xmlns:a16="http://schemas.microsoft.com/office/drawing/2014/main" id="{0D8E2604-2592-4A00-AFFF-1A5D6F8EBBEF}"/>
               </a:ext>
             </a:extLst>
           </p:cNvPr>
@@ -3873,7 +3873,7 @@
           <p:cNvPr id="3" name="">
             <a:extLst xmlns:a="http://schemas.openxmlformats.org/drawingml/2006/main">
               <a:ext uri="{FF2B5EF4-FFF2-40B4-BE49-F238E27FC236}">
-                <a16:creationId xmlns:a16="http://schemas.microsoft.com/office/drawing/2014/main" id="{FCB7E4F3-B30F-4D50-86B6-842A0D60076B}"/>
+                <a16:creationId xmlns:a16="http://schemas.microsoft.com/office/drawing/2014/main" id="{828CE9FE-63E1-424C-856C-CAC0DB515547}"/>
               </a:ext>
             </a:extLst>
           </p:cNvPr>
@@ -3930,7 +3930,7 @@
           <p:cNvPr id="4" name="">
             <a:extLst xmlns:a="http://schemas.openxmlformats.org/drawingml/2006/main">
               <a:ext uri="{FF2B5EF4-FFF2-40B4-BE49-F238E27FC236}">
-                <a16:creationId xmlns:a16="http://schemas.microsoft.com/office/drawing/2014/main" id="{B813A88C-68DD-41BC-B3C6-2FA69B82FD45}"/>
+                <a16:creationId xmlns:a16="http://schemas.microsoft.com/office/drawing/2014/main" id="{725DAD63-8678-4336-857E-AC3DCF6254A7}"/>
               </a:ext>
             </a:extLst>
           </p:cNvPr>
@@ -3987,7 +3987,7 @@
           <p:cNvPr id="5" name="">
             <a:extLst xmlns:a="http://schemas.openxmlformats.org/drawingml/2006/main">
               <a:ext uri="{FF2B5EF4-FFF2-40B4-BE49-F238E27FC236}">
-                <a16:creationId xmlns:a16="http://schemas.microsoft.com/office/drawing/2014/main" id="{525B8524-4B10-45C4-AC98-433D7E19D3A1}"/>
+                <a16:creationId xmlns:a16="http://schemas.microsoft.com/office/drawing/2014/main" id="{ACB26F91-D836-4BDE-81D6-E2EF1F6B86C4}"/>
               </a:ext>
             </a:extLst>
           </p:cNvPr>
@@ -4017,7 +4017,7 @@
           <p:cNvPr id="6" name="">
             <a:extLst xmlns:a="http://schemas.openxmlformats.org/drawingml/2006/main">
               <a:ext uri="{FF2B5EF4-FFF2-40B4-BE49-F238E27FC236}">
-                <a16:creationId xmlns:a16="http://schemas.microsoft.com/office/drawing/2014/main" id="{96B9241D-362E-42CF-8BBF-C678D25CCCC3}"/>
+                <a16:creationId xmlns:a16="http://schemas.microsoft.com/office/drawing/2014/main" id="{8072D3B7-66D4-4EF8-A1F9-C67600FF1E38}"/>
               </a:ext>
             </a:extLst>
           </p:cNvPr>
@@ -4074,7 +4074,7 @@
           <p:cNvPr id="7" name="">
             <a:extLst xmlns:a="http://schemas.openxmlformats.org/drawingml/2006/main">
               <a:ext uri="{FF2B5EF4-FFF2-40B4-BE49-F238E27FC236}">
-                <a16:creationId xmlns:a16="http://schemas.microsoft.com/office/drawing/2014/main" id="{F477322E-5546-4244-8C92-7185C3C171AC}"/>
+                <a16:creationId xmlns:a16="http://schemas.microsoft.com/office/drawing/2014/main" id="{F6A03BB4-055C-4C46-9909-52A386C421B8}"/>
               </a:ext>
             </a:extLst>
           </p:cNvPr>
@@ -4131,7 +4131,7 @@
           <p:cNvPr id="8" name="">
             <a:extLst xmlns:a="http://schemas.openxmlformats.org/drawingml/2006/main">
               <a:ext uri="{FF2B5EF4-FFF2-40B4-BE49-F238E27FC236}">
-                <a16:creationId xmlns:a16="http://schemas.microsoft.com/office/drawing/2014/main" id="{E7AA011B-BDBA-40B9-8B54-79D540C3EDFB}"/>
+                <a16:creationId xmlns:a16="http://schemas.microsoft.com/office/drawing/2014/main" id="{8E6AA2D1-FE63-4579-8C77-CCE46FFAAB7D}"/>
               </a:ext>
             </a:extLst>
           </p:cNvPr>
@@ -4166,7 +4166,7 @@
           <p:cNvPr id="9" name="">
             <a:extLst xmlns:a="http://schemas.openxmlformats.org/drawingml/2006/main">
               <a:ext uri="{FF2B5EF4-FFF2-40B4-BE49-F238E27FC236}">
-                <a16:creationId xmlns:a16="http://schemas.microsoft.com/office/drawing/2014/main" id="{DC4E6A63-2DFA-49D3-904F-7D5169F11629}"/>
+                <a16:creationId xmlns:a16="http://schemas.microsoft.com/office/drawing/2014/main" id="{E0D9B03F-DF86-40F6-AB69-8240681C2557}"/>
               </a:ext>
             </a:extLst>
           </p:cNvPr>
@@ -4223,7 +4223,7 @@
           <p:cNvPr id="10" name="">
             <a:extLst xmlns:a="http://schemas.openxmlformats.org/drawingml/2006/main">
               <a:ext uri="{FF2B5EF4-FFF2-40B4-BE49-F238E27FC236}">
-                <a16:creationId xmlns:a16="http://schemas.microsoft.com/office/drawing/2014/main" id="{4DE5B061-D230-49E0-B366-C24F8DB583B3}"/>
+                <a16:creationId xmlns:a16="http://schemas.microsoft.com/office/drawing/2014/main" id="{7B85FEB3-BC53-477C-9691-E1A0084A6C3F}"/>
               </a:ext>
             </a:extLst>
           </p:cNvPr>
@@ -4280,7 +4280,7 @@
           <p:cNvPr id="11" name="">
             <a:extLst xmlns:a="http://schemas.openxmlformats.org/drawingml/2006/main">
               <a:ext uri="{FF2B5EF4-FFF2-40B4-BE49-F238E27FC236}">
-                <a16:creationId xmlns:a16="http://schemas.microsoft.com/office/drawing/2014/main" id="{D42B25E1-6C03-4161-BA81-C27C4254ECE0}"/>
+                <a16:creationId xmlns:a16="http://schemas.microsoft.com/office/drawing/2014/main" id="{AB030EF8-0700-4F39-BFD2-41A8E710D99F}"/>
               </a:ext>
             </a:extLst>
           </p:cNvPr>
@@ -4310,7 +4310,7 @@
           <p:cNvPr id="12" name="">
             <a:extLst xmlns:a="http://schemas.openxmlformats.org/drawingml/2006/main">
               <a:ext uri="{FF2B5EF4-FFF2-40B4-BE49-F238E27FC236}">
-                <a16:creationId xmlns:a16="http://schemas.microsoft.com/office/drawing/2014/main" id="{59F1A37C-6254-4219-BF66-CDFECA2D772C}"/>
+                <a16:creationId xmlns:a16="http://schemas.microsoft.com/office/drawing/2014/main" id="{CB898725-53A7-4141-900A-AD0F283B070F}"/>
               </a:ext>
             </a:extLst>
           </p:cNvPr>
@@ -4367,7 +4367,7 @@
           <p:cNvPr id="13" name="">
             <a:extLst xmlns:a="http://schemas.openxmlformats.org/drawingml/2006/main">
               <a:ext uri="{FF2B5EF4-FFF2-40B4-BE49-F238E27FC236}">
-                <a16:creationId xmlns:a16="http://schemas.microsoft.com/office/drawing/2014/main" id="{6844686F-8D48-4142-8740-286CA120D415}"/>
+                <a16:creationId xmlns:a16="http://schemas.microsoft.com/office/drawing/2014/main" id="{2DECA2D1-4091-4289-A50B-8AACBD8C14E3}"/>
               </a:ext>
             </a:extLst>
           </p:cNvPr>
@@ -4402,7 +4402,7 @@
           <p:cNvPr id="14" name="">
             <a:extLst xmlns:a="http://schemas.openxmlformats.org/drawingml/2006/main">
               <a:ext uri="{FF2B5EF4-FFF2-40B4-BE49-F238E27FC236}">
-                <a16:creationId xmlns:a16="http://schemas.microsoft.com/office/drawing/2014/main" id="{EFFC0887-AFE7-4962-8D0A-5C60EE768F8C}"/>
+                <a16:creationId xmlns:a16="http://schemas.microsoft.com/office/drawing/2014/main" id="{2B5201F9-FB83-4D14-88A7-87A09A67A39F}"/>
               </a:ext>
             </a:extLst>
           </p:cNvPr>
@@ -4459,7 +4459,7 @@
           <p:cNvPr id="15" name="">
             <a:extLst xmlns:a="http://schemas.openxmlformats.org/drawingml/2006/main">
               <a:ext uri="{FF2B5EF4-FFF2-40B4-BE49-F238E27FC236}">
-                <a16:creationId xmlns:a16="http://schemas.microsoft.com/office/drawing/2014/main" id="{111BC2B7-8527-4E17-8569-BB575780579D}"/>
+                <a16:creationId xmlns:a16="http://schemas.microsoft.com/office/drawing/2014/main" id="{11E9B8BF-26A4-4034-B552-E6520C6DDD67}"/>
               </a:ext>
             </a:extLst>
           </p:cNvPr>
@@ -4516,7 +4516,7 @@
           <p:cNvPr id="16" name="">
             <a:extLst xmlns:a="http://schemas.openxmlformats.org/drawingml/2006/main">
               <a:ext uri="{FF2B5EF4-FFF2-40B4-BE49-F238E27FC236}">
-                <a16:creationId xmlns:a16="http://schemas.microsoft.com/office/drawing/2014/main" id="{421D4739-580F-4281-A837-0988871C7844}"/>
+                <a16:creationId xmlns:a16="http://schemas.microsoft.com/office/drawing/2014/main" id="{2E7C22C2-8269-4CF0-8908-19056423E980}"/>
               </a:ext>
             </a:extLst>
           </p:cNvPr>
@@ -4546,7 +4546,7 @@
           <p:cNvPr id="17" name="">
             <a:extLst xmlns:a="http://schemas.openxmlformats.org/drawingml/2006/main">
               <a:ext uri="{FF2B5EF4-FFF2-40B4-BE49-F238E27FC236}">
-                <a16:creationId xmlns:a16="http://schemas.microsoft.com/office/drawing/2014/main" id="{C10ACE66-9983-4BF3-9A74-24BD57CE7499}"/>
+                <a16:creationId xmlns:a16="http://schemas.microsoft.com/office/drawing/2014/main" id="{FBDEBA49-6D1C-469A-BB7E-9847FF177500}"/>
               </a:ext>
             </a:extLst>
           </p:cNvPr>
@@ -4603,7 +4603,7 @@
           <p:cNvPr id="18" name="">
             <a:extLst xmlns:a="http://schemas.openxmlformats.org/drawingml/2006/main">
               <a:ext uri="{FF2B5EF4-FFF2-40B4-BE49-F238E27FC236}">
-                <a16:creationId xmlns:a16="http://schemas.microsoft.com/office/drawing/2014/main" id="{9C91077F-A6E0-43E8-84B8-C10120CD6031}"/>
+                <a16:creationId xmlns:a16="http://schemas.microsoft.com/office/drawing/2014/main" id="{7730CEF2-4131-4923-B509-12B3A7C4790A}"/>
               </a:ext>
             </a:extLst>
           </p:cNvPr>
@@ -4638,7 +4638,7 @@
           <p:cNvPr id="19" name="">
             <a:extLst xmlns:a="http://schemas.openxmlformats.org/drawingml/2006/main">
               <a:ext uri="{FF2B5EF4-FFF2-40B4-BE49-F238E27FC236}">
-                <a16:creationId xmlns:a16="http://schemas.microsoft.com/office/drawing/2014/main" id="{E823BDA1-1E5B-48FD-87D2-9E9682A41699}"/>
+                <a16:creationId xmlns:a16="http://schemas.microsoft.com/office/drawing/2014/main" id="{47928CF0-84A6-4ECD-A1FE-17D719670857}"/>
               </a:ext>
             </a:extLst>
           </p:cNvPr>
@@ -4695,7 +4695,7 @@
           <p:cNvPr id="20" name="">
             <a:extLst xmlns:a="http://schemas.openxmlformats.org/drawingml/2006/main">
               <a:ext uri="{FF2B5EF4-FFF2-40B4-BE49-F238E27FC236}">
-                <a16:creationId xmlns:a16="http://schemas.microsoft.com/office/drawing/2014/main" id="{D5687DCB-89C5-4FA7-BA6B-23EEF8FF3D27}"/>
+                <a16:creationId xmlns:a16="http://schemas.microsoft.com/office/drawing/2014/main" id="{ADD7D94D-ECA6-451B-81D1-C60F2DDB6EFD}"/>
               </a:ext>
             </a:extLst>
           </p:cNvPr>
@@ -4752,7 +4752,7 @@
           <p:cNvPr id="21" name="">
             <a:extLst xmlns:a="http://schemas.openxmlformats.org/drawingml/2006/main">
               <a:ext uri="{FF2B5EF4-FFF2-40B4-BE49-F238E27FC236}">
-                <a16:creationId xmlns:a16="http://schemas.microsoft.com/office/drawing/2014/main" id="{CA5E1F4A-1C72-482B-8234-5D10B188A326}"/>
+                <a16:creationId xmlns:a16="http://schemas.microsoft.com/office/drawing/2014/main" id="{111F2D7D-533A-447C-B6E4-3A55F5725E50}"/>
               </a:ext>
             </a:extLst>
           </p:cNvPr>
@@ -4809,7 +4809,7 @@
           <p:cNvPr id="22" name="">
             <a:extLst xmlns:a="http://schemas.openxmlformats.org/drawingml/2006/main">
               <a:ext uri="{FF2B5EF4-FFF2-40B4-BE49-F238E27FC236}">
-                <a16:creationId xmlns:a16="http://schemas.microsoft.com/office/drawing/2014/main" id="{EAC38BD3-5C67-4E9C-A080-B3DFCAC37E5B}"/>
+                <a16:creationId xmlns:a16="http://schemas.microsoft.com/office/drawing/2014/main" id="{3B19BFD4-76A6-4844-A7FB-43F31B6BBA03}"/>
               </a:ext>
             </a:extLst>
           </p:cNvPr>
@@ -4866,7 +4866,7 @@
           <p:cNvPr id="23" name="">
             <a:extLst xmlns:a="http://schemas.openxmlformats.org/drawingml/2006/main">
               <a:ext uri="{FF2B5EF4-FFF2-40B4-BE49-F238E27FC236}">
-                <a16:creationId xmlns:a16="http://schemas.microsoft.com/office/drawing/2014/main" id="{93D38DE6-EE66-4B5E-A894-2E0BBDBC0B93}"/>
+                <a16:creationId xmlns:a16="http://schemas.microsoft.com/office/drawing/2014/main" id="{431EE623-57A6-49C6-803A-77C45B60781F}"/>
               </a:ext>
             </a:extLst>
           </p:cNvPr>
@@ -4901,7 +4901,7 @@
           <p:cNvPr id="24" name="">
             <a:extLst xmlns:a="http://schemas.openxmlformats.org/drawingml/2006/main">
               <a:ext uri="{FF2B5EF4-FFF2-40B4-BE49-F238E27FC236}">
-                <a16:creationId xmlns:a16="http://schemas.microsoft.com/office/drawing/2014/main" id="{91756EFD-9498-4230-8AD6-73839F620C3D}"/>
+                <a16:creationId xmlns:a16="http://schemas.microsoft.com/office/drawing/2014/main" id="{B76806ED-7D1C-4524-A37B-6F6E4CA10B47}"/>
               </a:ext>
             </a:extLst>
           </p:cNvPr>
@@ -4958,7 +4958,7 @@
           <p:cNvPr id="25" name="">
             <a:extLst xmlns:a="http://schemas.openxmlformats.org/drawingml/2006/main">
               <a:ext uri="{FF2B5EF4-FFF2-40B4-BE49-F238E27FC236}">
-                <a16:creationId xmlns:a16="http://schemas.microsoft.com/office/drawing/2014/main" id="{C8C3FD9F-742C-4197-B182-86FF36846A14}"/>
+                <a16:creationId xmlns:a16="http://schemas.microsoft.com/office/drawing/2014/main" id="{58BF47C3-563A-4493-9FB1-E99752056818}"/>
               </a:ext>
             </a:extLst>
           </p:cNvPr>
@@ -5015,7 +5015,7 @@
           <p:cNvPr id="26" name="">
             <a:extLst xmlns:a="http://schemas.openxmlformats.org/drawingml/2006/main">
               <a:ext uri="{FF2B5EF4-FFF2-40B4-BE49-F238E27FC236}">
-                <a16:creationId xmlns:a16="http://schemas.microsoft.com/office/drawing/2014/main" id="{2FB4E6BA-791B-432D-8DDA-D58386542E78}"/>
+                <a16:creationId xmlns:a16="http://schemas.microsoft.com/office/drawing/2014/main" id="{785A148C-6FB0-49EC-8B3E-19CC2D82DAB8}"/>
               </a:ext>
             </a:extLst>
           </p:cNvPr>
@@ -5045,7 +5045,7 @@
           <p:cNvPr id="27" name="">
             <a:extLst xmlns:a="http://schemas.openxmlformats.org/drawingml/2006/main">
               <a:ext uri="{FF2B5EF4-FFF2-40B4-BE49-F238E27FC236}">
-                <a16:creationId xmlns:a16="http://schemas.microsoft.com/office/drawing/2014/main" id="{F1606FA7-EB2D-40E4-A260-F602B0E3638E}"/>
+                <a16:creationId xmlns:a16="http://schemas.microsoft.com/office/drawing/2014/main" id="{FA4D1DD0-ABF2-4A3E-B285-3060AD7432DB}"/>
               </a:ext>
             </a:extLst>
           </p:cNvPr>
@@ -5102,7 +5102,7 @@
           <p:cNvPr id="28" name="">
             <a:extLst xmlns:a="http://schemas.openxmlformats.org/drawingml/2006/main">
               <a:ext uri="{FF2B5EF4-FFF2-40B4-BE49-F238E27FC236}">
-                <a16:creationId xmlns:a16="http://schemas.microsoft.com/office/drawing/2014/main" id="{5D8C1D32-946E-4DF1-B2FC-1F2D94DF0440}"/>
+                <a16:creationId xmlns:a16="http://schemas.microsoft.com/office/drawing/2014/main" id="{2FEF94B7-F94D-4398-92DE-7E217F1FB254}"/>
               </a:ext>
             </a:extLst>
           </p:cNvPr>
@@ -5137,7 +5137,7 @@
           <p:cNvPr id="29" name="">
             <a:extLst xmlns:a="http://schemas.openxmlformats.org/drawingml/2006/main">
               <a:ext uri="{FF2B5EF4-FFF2-40B4-BE49-F238E27FC236}">
-                <a16:creationId xmlns:a16="http://schemas.microsoft.com/office/drawing/2014/main" id="{D161C463-1797-4D08-A096-060D3ED8259A}"/>
+                <a16:creationId xmlns:a16="http://schemas.microsoft.com/office/drawing/2014/main" id="{8968CB58-B28C-4B25-9C55-4FBC20DDB8FD}"/>
               </a:ext>
             </a:extLst>
           </p:cNvPr>
@@ -5194,7 +5194,7 @@
           <p:cNvPr id="30" name="">
             <a:extLst xmlns:a="http://schemas.openxmlformats.org/drawingml/2006/main">
               <a:ext uri="{FF2B5EF4-FFF2-40B4-BE49-F238E27FC236}">
-                <a16:creationId xmlns:a16="http://schemas.microsoft.com/office/drawing/2014/main" id="{B219C2DE-0891-4910-BB4E-39030A07AE76}"/>
+                <a16:creationId xmlns:a16="http://schemas.microsoft.com/office/drawing/2014/main" id="{D1439348-6D86-4A68-86D4-60627151DCA1}"/>
               </a:ext>
             </a:extLst>
           </p:cNvPr>
@@ -5251,7 +5251,7 @@
           <p:cNvPr id="31" name="">
             <a:extLst xmlns:a="http://schemas.openxmlformats.org/drawingml/2006/main">
               <a:ext uri="{FF2B5EF4-FFF2-40B4-BE49-F238E27FC236}">
-                <a16:creationId xmlns:a16="http://schemas.microsoft.com/office/drawing/2014/main" id="{0017DF7A-60F2-4485-B2F4-767A517D0F6D}"/>
+                <a16:creationId xmlns:a16="http://schemas.microsoft.com/office/drawing/2014/main" id="{AAD062EB-E77D-4378-9A75-BF6F2016AC58}"/>
               </a:ext>
             </a:extLst>
           </p:cNvPr>
@@ -5281,7 +5281,7 @@
           <p:cNvPr id="32" name="">
             <a:extLst xmlns:a="http://schemas.openxmlformats.org/drawingml/2006/main">
               <a:ext uri="{FF2B5EF4-FFF2-40B4-BE49-F238E27FC236}">
-                <a16:creationId xmlns:a16="http://schemas.microsoft.com/office/drawing/2014/main" id="{B230780F-8939-442D-9651-C95AC75D751D}"/>
+                <a16:creationId xmlns:a16="http://schemas.microsoft.com/office/drawing/2014/main" id="{701B9A53-D8F9-48F9-820C-13D4E9ED0124}"/>
               </a:ext>
             </a:extLst>
           </p:cNvPr>
@@ -5338,7 +5338,7 @@
           <p:cNvPr id="33" name="">
             <a:extLst xmlns:a="http://schemas.openxmlformats.org/drawingml/2006/main">
               <a:ext uri="{FF2B5EF4-FFF2-40B4-BE49-F238E27FC236}">
-                <a16:creationId xmlns:a16="http://schemas.microsoft.com/office/drawing/2014/main" id="{A70A7B98-0356-4AEC-8623-C8706CDD24F0}"/>
+                <a16:creationId xmlns:a16="http://schemas.microsoft.com/office/drawing/2014/main" id="{66E3CE4E-1956-42FD-8452-1A53DAEC425E}"/>
               </a:ext>
             </a:extLst>
           </p:cNvPr>
@@ -5373,7 +5373,7 @@
           <p:cNvPr id="34" name="">
             <a:extLst xmlns:a="http://schemas.openxmlformats.org/drawingml/2006/main">
               <a:ext uri="{FF2B5EF4-FFF2-40B4-BE49-F238E27FC236}">
-                <a16:creationId xmlns:a16="http://schemas.microsoft.com/office/drawing/2014/main" id="{B7F97ACA-56F4-4050-A374-1013142E30BF}"/>
+                <a16:creationId xmlns:a16="http://schemas.microsoft.com/office/drawing/2014/main" id="{7F5D6BD1-A5C4-423A-9475-27EB2E9A1F54}"/>
               </a:ext>
             </a:extLst>
           </p:cNvPr>
@@ -5430,7 +5430,7 @@
           <p:cNvPr id="35" name="">
             <a:extLst xmlns:a="http://schemas.openxmlformats.org/drawingml/2006/main">
               <a:ext uri="{FF2B5EF4-FFF2-40B4-BE49-F238E27FC236}">
-                <a16:creationId xmlns:a16="http://schemas.microsoft.com/office/drawing/2014/main" id="{7AB0214F-E61C-43F0-B323-1B1E8D1F2084}"/>
+                <a16:creationId xmlns:a16="http://schemas.microsoft.com/office/drawing/2014/main" id="{1AD03E5F-4E90-409C-8EA9-2FF3E2937F46}"/>
               </a:ext>
             </a:extLst>
           </p:cNvPr>
@@ -5487,7 +5487,7 @@
           <p:cNvPr id="36" name="">
             <a:extLst xmlns:a="http://schemas.openxmlformats.org/drawingml/2006/main">
               <a:ext uri="{FF2B5EF4-FFF2-40B4-BE49-F238E27FC236}">
-                <a16:creationId xmlns:a16="http://schemas.microsoft.com/office/drawing/2014/main" id="{77FE0362-CF83-413B-A097-362751BAAE99}"/>
+                <a16:creationId xmlns:a16="http://schemas.microsoft.com/office/drawing/2014/main" id="{34788E47-DE0D-419E-9600-EF47B6B144EA}"/>
               </a:ext>
             </a:extLst>
           </p:cNvPr>
@@ -5517,7 +5517,7 @@
           <p:cNvPr id="37" name="">
             <a:extLst xmlns:a="http://schemas.openxmlformats.org/drawingml/2006/main">
               <a:ext uri="{FF2B5EF4-FFF2-40B4-BE49-F238E27FC236}">
-                <a16:creationId xmlns:a16="http://schemas.microsoft.com/office/drawing/2014/main" id="{43CB4960-3C12-45B6-AAD3-8AB0D4056667}"/>
+                <a16:creationId xmlns:a16="http://schemas.microsoft.com/office/drawing/2014/main" id="{554481BA-146C-440A-A1BB-DFBB4DB399CD}"/>
               </a:ext>
             </a:extLst>
           </p:cNvPr>
@@ -5552,7 +5552,7 @@
           <p:cNvPr id="38" name="">
             <a:extLst xmlns:a="http://schemas.openxmlformats.org/drawingml/2006/main">
               <a:ext uri="{FF2B5EF4-FFF2-40B4-BE49-F238E27FC236}">
-                <a16:creationId xmlns:a16="http://schemas.microsoft.com/office/drawing/2014/main" id="{BCD8880F-9F18-4FA2-B53D-55C26ABC3DEC}"/>
+                <a16:creationId xmlns:a16="http://schemas.microsoft.com/office/drawing/2014/main" id="{BC24B51F-D24B-4986-8D66-91C366E64E4D}"/>
               </a:ext>
             </a:extLst>
           </p:cNvPr>
@@ -5607,7 +5607,7 @@
     </p:spTree>
     <p:extLst>
       <p:ext uri="{BB962C8B-B14F-4D97-AF65-F5344CB8AC3E}">
-        <p14:creationId xmlns:p14="http://schemas.microsoft.com/office/powerpoint/2010/main" val="269258275"/>
+        <p14:creationId xmlns:p14="http://schemas.microsoft.com/office/powerpoint/2010/main" val="764625541"/>
       </p:ext>
     </p:extLst>
   </p:cSld>
@@ -5638,7 +5638,7 @@
           <p:cNvPr id="45" name="">
             <a:extLst xmlns:a="http://schemas.openxmlformats.org/drawingml/2006/main">
               <a:ext uri="{FF2B5EF4-FFF2-40B4-BE49-F238E27FC236}">
-                <a16:creationId xmlns:a16="http://schemas.microsoft.com/office/drawing/2014/main" id="{55DE9EDD-4ED7-435B-8B14-A138C36361BC}"/>
+                <a16:creationId xmlns:a16="http://schemas.microsoft.com/office/drawing/2014/main" id="{4B2E955C-DC5E-4D11-97BB-ACECD3B17A38}"/>
               </a:ext>
             </a:extLst>
           </p:cNvPr>
@@ -5668,7 +5668,7 @@
           <p:cNvPr id="2" name="">
             <a:extLst xmlns:a="http://schemas.openxmlformats.org/drawingml/2006/main">
               <a:ext uri="{FF2B5EF4-FFF2-40B4-BE49-F238E27FC236}">
-                <a16:creationId xmlns:a16="http://schemas.microsoft.com/office/drawing/2014/main" id="{9D589DE8-5A13-4236-90B5-AFA21DADDDB0}"/>
+                <a16:creationId xmlns:a16="http://schemas.microsoft.com/office/drawing/2014/main" id="{EF5447A4-1033-46E8-A9EA-0944BDC36DF9}"/>
               </a:ext>
             </a:extLst>
           </p:cNvPr>
@@ -5725,7 +5725,7 @@
           <p:cNvPr id="3" name="">
             <a:extLst xmlns:a="http://schemas.openxmlformats.org/drawingml/2006/main">
               <a:ext uri="{FF2B5EF4-FFF2-40B4-BE49-F238E27FC236}">
-                <a16:creationId xmlns:a16="http://schemas.microsoft.com/office/drawing/2014/main" id="{94C0B858-935A-4677-BC87-FFA58BAF44BF}"/>
+                <a16:creationId xmlns:a16="http://schemas.microsoft.com/office/drawing/2014/main" id="{578E5DFC-C133-4D58-B865-ADBE413C7016}"/>
               </a:ext>
             </a:extLst>
           </p:cNvPr>
@@ -5782,7 +5782,7 @@
           <p:cNvPr id="4" name="">
             <a:extLst xmlns:a="http://schemas.openxmlformats.org/drawingml/2006/main">
               <a:ext uri="{FF2B5EF4-FFF2-40B4-BE49-F238E27FC236}">
-                <a16:creationId xmlns:a16="http://schemas.microsoft.com/office/drawing/2014/main" id="{85DAEA14-2EF6-4C70-9D32-4C812DBC7BB2}"/>
+                <a16:creationId xmlns:a16="http://schemas.microsoft.com/office/drawing/2014/main" id="{865BC3CB-A75C-4A13-834A-5D4A0BB94B78}"/>
               </a:ext>
             </a:extLst>
           </p:cNvPr>
@@ -5839,7 +5839,7 @@
           <p:cNvPr id="5" name="">
             <a:extLst xmlns:a="http://schemas.openxmlformats.org/drawingml/2006/main">
               <a:ext uri="{FF2B5EF4-FFF2-40B4-BE49-F238E27FC236}">
-                <a16:creationId xmlns:a16="http://schemas.microsoft.com/office/drawing/2014/main" id="{46851720-8A0C-4EE7-B69F-6AE2F14BBDAD}"/>
+                <a16:creationId xmlns:a16="http://schemas.microsoft.com/office/drawing/2014/main" id="{F5EA3D49-EB94-425C-B0C8-E3AA85CCAF6C}"/>
               </a:ext>
             </a:extLst>
           </p:cNvPr>
@@ -5874,7 +5874,7 @@
           <p:cNvPr id="6" name="">
             <a:extLst xmlns:a="http://schemas.openxmlformats.org/drawingml/2006/main">
               <a:ext uri="{FF2B5EF4-FFF2-40B4-BE49-F238E27FC236}">
-                <a16:creationId xmlns:a16="http://schemas.microsoft.com/office/drawing/2014/main" id="{A4625FD9-18CC-4A39-BEE3-E43000E3A752}"/>
+                <a16:creationId xmlns:a16="http://schemas.microsoft.com/office/drawing/2014/main" id="{8E362E7E-6A5B-4342-8BF3-C221D64B58BD}"/>
               </a:ext>
             </a:extLst>
           </p:cNvPr>
@@ -5931,7 +5931,7 @@
           <p:cNvPr id="7" name="">
             <a:extLst xmlns:a="http://schemas.openxmlformats.org/drawingml/2006/main">
               <a:ext uri="{FF2B5EF4-FFF2-40B4-BE49-F238E27FC236}">
-                <a16:creationId xmlns:a16="http://schemas.microsoft.com/office/drawing/2014/main" id="{F54D35E5-72A0-4E34-9A3B-79D6758DE4CC}"/>
+                <a16:creationId xmlns:a16="http://schemas.microsoft.com/office/drawing/2014/main" id="{096E0978-6053-4FAE-A829-9339289D78C8}"/>
               </a:ext>
             </a:extLst>
           </p:cNvPr>
@@ -6005,7 +6005,7 @@
           <p:cNvPr id="8" name="">
             <a:extLst xmlns:a="http://schemas.openxmlformats.org/drawingml/2006/main">
               <a:ext uri="{FF2B5EF4-FFF2-40B4-BE49-F238E27FC236}">
-                <a16:creationId xmlns:a16="http://schemas.microsoft.com/office/drawing/2014/main" id="{FDB870E8-D7D4-4979-B6CA-8D3A4AB45ADA}"/>
+                <a16:creationId xmlns:a16="http://schemas.microsoft.com/office/drawing/2014/main" id="{63411208-BF26-46C6-BE3E-19894C76D5BB}"/>
               </a:ext>
             </a:extLst>
           </p:cNvPr>
@@ -6062,7 +6062,7 @@
           <p:cNvPr id="9" name="">
             <a:extLst xmlns:a="http://schemas.openxmlformats.org/drawingml/2006/main">
               <a:ext uri="{FF2B5EF4-FFF2-40B4-BE49-F238E27FC236}">
-                <a16:creationId xmlns:a16="http://schemas.microsoft.com/office/drawing/2014/main" id="{6E25A31F-0D73-4A4E-BF8A-839D3F814471}"/>
+                <a16:creationId xmlns:a16="http://schemas.microsoft.com/office/drawing/2014/main" id="{B7ADD4FD-389D-4967-AED7-0FB764E9874C}"/>
               </a:ext>
             </a:extLst>
           </p:cNvPr>
@@ -6097,7 +6097,7 @@
           <p:cNvPr id="10" name="">
             <a:extLst xmlns:a="http://schemas.openxmlformats.org/drawingml/2006/main">
               <a:ext uri="{FF2B5EF4-FFF2-40B4-BE49-F238E27FC236}">
-                <a16:creationId xmlns:a16="http://schemas.microsoft.com/office/drawing/2014/main" id="{F646280C-89D7-4FF9-9E95-3FF1D6C82AE0}"/>
+                <a16:creationId xmlns:a16="http://schemas.microsoft.com/office/drawing/2014/main" id="{3B1DFE82-9A33-4077-80CE-8C39564D9427}"/>
               </a:ext>
             </a:extLst>
           </p:cNvPr>
@@ -6154,7 +6154,7 @@
           <p:cNvPr id="11" name="">
             <a:extLst xmlns:a="http://schemas.openxmlformats.org/drawingml/2006/main">
               <a:ext uri="{FF2B5EF4-FFF2-40B4-BE49-F238E27FC236}">
-                <a16:creationId xmlns:a16="http://schemas.microsoft.com/office/drawing/2014/main" id="{A2B8CE77-0156-4408-BC68-006961080621}"/>
+                <a16:creationId xmlns:a16="http://schemas.microsoft.com/office/drawing/2014/main" id="{7C231C6C-BEF0-4E9C-9A69-400C5876DCCC}"/>
               </a:ext>
             </a:extLst>
           </p:cNvPr>
@@ -6228,7 +6228,7 @@
           <p:cNvPr id="12" name="">
             <a:extLst xmlns:a="http://schemas.openxmlformats.org/drawingml/2006/main">
               <a:ext uri="{FF2B5EF4-FFF2-40B4-BE49-F238E27FC236}">
-                <a16:creationId xmlns:a16="http://schemas.microsoft.com/office/drawing/2014/main" id="{5A2AEFC2-E952-4556-BBB6-3E3C1E15EF2A}"/>
+                <a16:creationId xmlns:a16="http://schemas.microsoft.com/office/drawing/2014/main" id="{75F2484B-4AC6-4C89-AB21-03F449F17BCC}"/>
               </a:ext>
             </a:extLst>
           </p:cNvPr>
@@ -6285,7 +6285,7 @@
           <p:cNvPr id="13" name="">
             <a:extLst xmlns:a="http://schemas.openxmlformats.org/drawingml/2006/main">
               <a:ext uri="{FF2B5EF4-FFF2-40B4-BE49-F238E27FC236}">
-                <a16:creationId xmlns:a16="http://schemas.microsoft.com/office/drawing/2014/main" id="{17531D08-9649-46FD-A387-034849E3DEB8}"/>
+                <a16:creationId xmlns:a16="http://schemas.microsoft.com/office/drawing/2014/main" id="{DC82B450-64DA-40EB-B7A7-586AB2C723EA}"/>
               </a:ext>
             </a:extLst>
           </p:cNvPr>
@@ -6320,7 +6320,7 @@
           <p:cNvPr id="14" name="">
             <a:extLst xmlns:a="http://schemas.openxmlformats.org/drawingml/2006/main">
               <a:ext uri="{FF2B5EF4-FFF2-40B4-BE49-F238E27FC236}">
-                <a16:creationId xmlns:a16="http://schemas.microsoft.com/office/drawing/2014/main" id="{DE355AC3-1698-49A1-9924-AEC87D4E5825}"/>
+                <a16:creationId xmlns:a16="http://schemas.microsoft.com/office/drawing/2014/main" id="{FC353DBB-373E-4729-896B-C534128B906A}"/>
               </a:ext>
             </a:extLst>
           </p:cNvPr>
@@ -6377,7 +6377,7 @@
           <p:cNvPr id="15" name="">
             <a:extLst xmlns:a="http://schemas.openxmlformats.org/drawingml/2006/main">
               <a:ext uri="{FF2B5EF4-FFF2-40B4-BE49-F238E27FC236}">
-                <a16:creationId xmlns:a16="http://schemas.microsoft.com/office/drawing/2014/main" id="{90AE815C-0C48-4353-B785-39E45CA20CBF}"/>
+                <a16:creationId xmlns:a16="http://schemas.microsoft.com/office/drawing/2014/main" id="{F0CB0CB4-E218-4A39-BE8A-F1234E8C1BEB}"/>
               </a:ext>
             </a:extLst>
           </p:cNvPr>
@@ -6451,7 +6451,7 @@
           <p:cNvPr id="16" name="">
             <a:extLst xmlns:a="http://schemas.openxmlformats.org/drawingml/2006/main">
               <a:ext uri="{FF2B5EF4-FFF2-40B4-BE49-F238E27FC236}">
-                <a16:creationId xmlns:a16="http://schemas.microsoft.com/office/drawing/2014/main" id="{77E963DB-EE86-4888-A378-9F6FE6A347E1}"/>
+                <a16:creationId xmlns:a16="http://schemas.microsoft.com/office/drawing/2014/main" id="{6EF6928E-8DD5-432D-840A-70CC7B55C140}"/>
               </a:ext>
             </a:extLst>
           </p:cNvPr>
@@ -6508,7 +6508,7 @@
           <p:cNvPr id="17" name="">
             <a:extLst xmlns:a="http://schemas.openxmlformats.org/drawingml/2006/main">
               <a:ext uri="{FF2B5EF4-FFF2-40B4-BE49-F238E27FC236}">
-                <a16:creationId xmlns:a16="http://schemas.microsoft.com/office/drawing/2014/main" id="{CAF0BC0A-91D2-4DC7-B4EA-5086981DEB0D}"/>
+                <a16:creationId xmlns:a16="http://schemas.microsoft.com/office/drawing/2014/main" id="{54B88AE7-9D16-4AEC-B6A3-3A2EEA2B732F}"/>
               </a:ext>
             </a:extLst>
           </p:cNvPr>
@@ -6543,7 +6543,7 @@
           <p:cNvPr id="18" name="">
             <a:extLst xmlns:a="http://schemas.openxmlformats.org/drawingml/2006/main">
               <a:ext uri="{FF2B5EF4-FFF2-40B4-BE49-F238E27FC236}">
-                <a16:creationId xmlns:a16="http://schemas.microsoft.com/office/drawing/2014/main" id="{B4870159-BBD3-4232-9C02-32B60FCDECFE}"/>
+                <a16:creationId xmlns:a16="http://schemas.microsoft.com/office/drawing/2014/main" id="{D91E26F1-736B-438A-A802-A012A68ADE7E}"/>
               </a:ext>
             </a:extLst>
           </p:cNvPr>
@@ -6600,7 +6600,7 @@
           <p:cNvPr id="19" name="">
             <a:extLst xmlns:a="http://schemas.openxmlformats.org/drawingml/2006/main">
               <a:ext uri="{FF2B5EF4-FFF2-40B4-BE49-F238E27FC236}">
-                <a16:creationId xmlns:a16="http://schemas.microsoft.com/office/drawing/2014/main" id="{6FB4B940-5B11-4012-AB95-267ED9C81C73}"/>
+                <a16:creationId xmlns:a16="http://schemas.microsoft.com/office/drawing/2014/main" id="{A6EAD478-2DB6-4F78-8248-238365F99F78}"/>
               </a:ext>
             </a:extLst>
           </p:cNvPr>
@@ -6674,7 +6674,7 @@
           <p:cNvPr id="20" name="">
             <a:extLst xmlns:a="http://schemas.openxmlformats.org/drawingml/2006/main">
               <a:ext uri="{FF2B5EF4-FFF2-40B4-BE49-F238E27FC236}">
-                <a16:creationId xmlns:a16="http://schemas.microsoft.com/office/drawing/2014/main" id="{DDE50659-43F7-4446-9A49-7803BEEFC6F1}"/>
+                <a16:creationId xmlns:a16="http://schemas.microsoft.com/office/drawing/2014/main" id="{924ECDC3-369E-4C9E-B78E-51987D3F7D2F}"/>
               </a:ext>
             </a:extLst>
           </p:cNvPr>
@@ -6731,7 +6731,7 @@
           <p:cNvPr id="21" name="">
             <a:extLst xmlns:a="http://schemas.openxmlformats.org/drawingml/2006/main">
               <a:ext uri="{FF2B5EF4-FFF2-40B4-BE49-F238E27FC236}">
-                <a16:creationId xmlns:a16="http://schemas.microsoft.com/office/drawing/2014/main" id="{DDF178E2-73C6-4AD6-ABA5-2AB65391009F}"/>
+                <a16:creationId xmlns:a16="http://schemas.microsoft.com/office/drawing/2014/main" id="{F28DFD8D-CD9E-40DB-A4C6-E172B9D550B2}"/>
               </a:ext>
             </a:extLst>
           </p:cNvPr>
@@ -6766,7 +6766,7 @@
           <p:cNvPr id="22" name="">
             <a:extLst xmlns:a="http://schemas.openxmlformats.org/drawingml/2006/main">
               <a:ext uri="{FF2B5EF4-FFF2-40B4-BE49-F238E27FC236}">
-                <a16:creationId xmlns:a16="http://schemas.microsoft.com/office/drawing/2014/main" id="{5F411139-056B-4B59-A107-C1A38F27449B}"/>
+                <a16:creationId xmlns:a16="http://schemas.microsoft.com/office/drawing/2014/main" id="{35B13DF6-A7EC-4BA3-B0D8-CF90E73EA4BF}"/>
               </a:ext>
             </a:extLst>
           </p:cNvPr>
@@ -6823,7 +6823,7 @@
           <p:cNvPr id="23" name="">
             <a:extLst xmlns:a="http://schemas.openxmlformats.org/drawingml/2006/main">
               <a:ext uri="{FF2B5EF4-FFF2-40B4-BE49-F238E27FC236}">
-                <a16:creationId xmlns:a16="http://schemas.microsoft.com/office/drawing/2014/main" id="{B87E2C33-CC52-42FA-A0C4-C4E60EDF6B6A}"/>
+                <a16:creationId xmlns:a16="http://schemas.microsoft.com/office/drawing/2014/main" id="{229B8B21-0F9F-4E8B-AB42-B5BA615DC544}"/>
               </a:ext>
             </a:extLst>
           </p:cNvPr>
@@ -6897,7 +6897,7 @@
           <p:cNvPr id="24" name="">
             <a:extLst xmlns:a="http://schemas.openxmlformats.org/drawingml/2006/main">
               <a:ext uri="{FF2B5EF4-FFF2-40B4-BE49-F238E27FC236}">
-                <a16:creationId xmlns:a16="http://schemas.microsoft.com/office/drawing/2014/main" id="{76E43DC3-D62C-4113-BB41-5B945FFF874A}"/>
+                <a16:creationId xmlns:a16="http://schemas.microsoft.com/office/drawing/2014/main" id="{B0866DF9-7908-4EA1-B145-DB1AA9D18010}"/>
               </a:ext>
             </a:extLst>
           </p:cNvPr>
@@ -6954,7 +6954,7 @@
           <p:cNvPr id="25" name="">
             <a:extLst xmlns:a="http://schemas.openxmlformats.org/drawingml/2006/main">
               <a:ext uri="{FF2B5EF4-FFF2-40B4-BE49-F238E27FC236}">
-                <a16:creationId xmlns:a16="http://schemas.microsoft.com/office/drawing/2014/main" id="{22173F9C-7345-49E5-8EF3-9EE0411CF87E}"/>
+                <a16:creationId xmlns:a16="http://schemas.microsoft.com/office/drawing/2014/main" id="{B66636A8-109C-4D3A-9EBC-B490FB3899EC}"/>
               </a:ext>
             </a:extLst>
           </p:cNvPr>
@@ -6989,7 +6989,7 @@
           <p:cNvPr id="26" name="">
             <a:extLst xmlns:a="http://schemas.openxmlformats.org/drawingml/2006/main">
               <a:ext uri="{FF2B5EF4-FFF2-40B4-BE49-F238E27FC236}">
-                <a16:creationId xmlns:a16="http://schemas.microsoft.com/office/drawing/2014/main" id="{3C920FBA-5A30-4AFF-A408-DD6A8E12F315}"/>
+                <a16:creationId xmlns:a16="http://schemas.microsoft.com/office/drawing/2014/main" id="{E54C5FD3-69AD-4C59-AB94-8666A1CD7B84}"/>
               </a:ext>
             </a:extLst>
           </p:cNvPr>
@@ -7046,7 +7046,7 @@
           <p:cNvPr id="27" name="">
             <a:extLst xmlns:a="http://schemas.openxmlformats.org/drawingml/2006/main">
               <a:ext uri="{FF2B5EF4-FFF2-40B4-BE49-F238E27FC236}">
-                <a16:creationId xmlns:a16="http://schemas.microsoft.com/office/drawing/2014/main" id="{17729C1F-02C7-4956-9ADA-78FBFC39A8DA}"/>
+                <a16:creationId xmlns:a16="http://schemas.microsoft.com/office/drawing/2014/main" id="{77148A39-EA96-4B87-8ABA-18A87E4AB0F6}"/>
               </a:ext>
             </a:extLst>
           </p:cNvPr>
@@ -7120,7 +7120,7 @@
           <p:cNvPr id="28" name="">
             <a:extLst xmlns:a="http://schemas.openxmlformats.org/drawingml/2006/main">
               <a:ext uri="{FF2B5EF4-FFF2-40B4-BE49-F238E27FC236}">
-                <a16:creationId xmlns:a16="http://schemas.microsoft.com/office/drawing/2014/main" id="{B38254CE-BC58-4F0B-8BD4-15ED26BD8667}"/>
+                <a16:creationId xmlns:a16="http://schemas.microsoft.com/office/drawing/2014/main" id="{6E8BA223-97B2-4B9C-A52E-628716684910}"/>
               </a:ext>
             </a:extLst>
           </p:cNvPr>
@@ -7177,7 +7177,7 @@
           <p:cNvPr id="29" name="">
             <a:extLst xmlns:a="http://schemas.openxmlformats.org/drawingml/2006/main">
               <a:ext uri="{FF2B5EF4-FFF2-40B4-BE49-F238E27FC236}">
-                <a16:creationId xmlns:a16="http://schemas.microsoft.com/office/drawing/2014/main" id="{5DF8A97C-AEBD-4734-AAD9-617C04F0F71F}"/>
+                <a16:creationId xmlns:a16="http://schemas.microsoft.com/office/drawing/2014/main" id="{E29F91F5-8996-4AB5-9B6E-908F82DA5D33}"/>
               </a:ext>
             </a:extLst>
           </p:cNvPr>
@@ -7207,7 +7207,7 @@
           <p:cNvPr id="30" name="">
             <a:extLst xmlns:a="http://schemas.openxmlformats.org/drawingml/2006/main">
               <a:ext uri="{FF2B5EF4-FFF2-40B4-BE49-F238E27FC236}">
-                <a16:creationId xmlns:a16="http://schemas.microsoft.com/office/drawing/2014/main" id="{2FD82C9D-2E67-42E2-BEC0-A06364B85D72}"/>
+                <a16:creationId xmlns:a16="http://schemas.microsoft.com/office/drawing/2014/main" id="{3E21D272-DA85-4781-A518-C6FC114B5227}"/>
               </a:ext>
             </a:extLst>
           </p:cNvPr>
@@ -7264,7 +7264,7 @@
           <p:cNvPr id="31" name="">
             <a:extLst xmlns:a="http://schemas.openxmlformats.org/drawingml/2006/main">
               <a:ext uri="{FF2B5EF4-FFF2-40B4-BE49-F238E27FC236}">
-                <a16:creationId xmlns:a16="http://schemas.microsoft.com/office/drawing/2014/main" id="{784AE620-9E05-4F6A-A473-1C8676CB1EB8}"/>
+                <a16:creationId xmlns:a16="http://schemas.microsoft.com/office/drawing/2014/main" id="{117D0D9A-9352-4B98-8A19-582150CB91A4}"/>
               </a:ext>
             </a:extLst>
           </p:cNvPr>
@@ -7294,7 +7294,7 @@
           <p:cNvPr id="32" name="">
             <a:extLst xmlns:a="http://schemas.openxmlformats.org/drawingml/2006/main">
               <a:ext uri="{FF2B5EF4-FFF2-40B4-BE49-F238E27FC236}">
-                <a16:creationId xmlns:a16="http://schemas.microsoft.com/office/drawing/2014/main" id="{D3A95E88-60BC-48DC-A71F-9917556B6411}"/>
+                <a16:creationId xmlns:a16="http://schemas.microsoft.com/office/drawing/2014/main" id="{F5E741F0-A7B4-47E7-AF49-BD5070197018}"/>
               </a:ext>
             </a:extLst>
           </p:cNvPr>
@@ -7351,7 +7351,7 @@
           <p:cNvPr id="33" name="">
             <a:extLst xmlns:a="http://schemas.openxmlformats.org/drawingml/2006/main">
               <a:ext uri="{FF2B5EF4-FFF2-40B4-BE49-F238E27FC236}">
-                <a16:creationId xmlns:a16="http://schemas.microsoft.com/office/drawing/2014/main" id="{8B9E682A-436C-4851-A182-8006298516AB}"/>
+                <a16:creationId xmlns:a16="http://schemas.microsoft.com/office/drawing/2014/main" id="{3199C0F4-FD7B-4BA3-80CE-A43A65D6D0EB}"/>
               </a:ext>
             </a:extLst>
           </p:cNvPr>
@@ -7381,7 +7381,7 @@
           <p:cNvPr id="34" name="">
             <a:extLst xmlns:a="http://schemas.openxmlformats.org/drawingml/2006/main">
               <a:ext uri="{FF2B5EF4-FFF2-40B4-BE49-F238E27FC236}">
-                <a16:creationId xmlns:a16="http://schemas.microsoft.com/office/drawing/2014/main" id="{E25C9BF9-23A5-42A7-A828-26981CE9E0F8}"/>
+                <a16:creationId xmlns:a16="http://schemas.microsoft.com/office/drawing/2014/main" id="{3DB5C28D-7C67-43FD-844C-8EB721AA948F}"/>
               </a:ext>
             </a:extLst>
           </p:cNvPr>
@@ -7438,7 +7438,7 @@
           <p:cNvPr id="35" name="">
             <a:extLst xmlns:a="http://schemas.openxmlformats.org/drawingml/2006/main">
               <a:ext uri="{FF2B5EF4-FFF2-40B4-BE49-F238E27FC236}">
-                <a16:creationId xmlns:a16="http://schemas.microsoft.com/office/drawing/2014/main" id="{14890B64-FA22-406D-A365-A5D640712752}"/>
+                <a16:creationId xmlns:a16="http://schemas.microsoft.com/office/drawing/2014/main" id="{EF460BE7-F7D5-4723-B30E-49CB1339F3E1}"/>
               </a:ext>
             </a:extLst>
           </p:cNvPr>
@@ -7473,7 +7473,7 @@
           <p:cNvPr id="36" name="">
             <a:extLst xmlns:a="http://schemas.openxmlformats.org/drawingml/2006/main">
               <a:ext uri="{FF2B5EF4-FFF2-40B4-BE49-F238E27FC236}">
-                <a16:creationId xmlns:a16="http://schemas.microsoft.com/office/drawing/2014/main" id="{715F626E-BF62-4419-B245-A7DC83AA6A5A}"/>
+                <a16:creationId xmlns:a16="http://schemas.microsoft.com/office/drawing/2014/main" id="{D3352867-CDB1-4164-B1FA-E25660E38993}"/>
               </a:ext>
             </a:extLst>
           </p:cNvPr>
@@ -7530,7 +7530,7 @@
           <p:cNvPr id="37" name="">
             <a:extLst xmlns:a="http://schemas.openxmlformats.org/drawingml/2006/main">
               <a:ext uri="{FF2B5EF4-FFF2-40B4-BE49-F238E27FC236}">
-                <a16:creationId xmlns:a16="http://schemas.microsoft.com/office/drawing/2014/main" id="{2C3CEC1A-BA43-46B7-BD70-2572084D66E1}"/>
+                <a16:creationId xmlns:a16="http://schemas.microsoft.com/office/drawing/2014/main" id="{BB779522-4D8B-4973-9B60-E8CD05BB191C}"/>
               </a:ext>
             </a:extLst>
           </p:cNvPr>
@@ -7621,7 +7621,7 @@
           <p:cNvPr id="38" name="">
             <a:extLst xmlns:a="http://schemas.openxmlformats.org/drawingml/2006/main">
               <a:ext uri="{FF2B5EF4-FFF2-40B4-BE49-F238E27FC236}">
-                <a16:creationId xmlns:a16="http://schemas.microsoft.com/office/drawing/2014/main" id="{F04B401D-A740-4329-998D-43830214AD14}"/>
+                <a16:creationId xmlns:a16="http://schemas.microsoft.com/office/drawing/2014/main" id="{00167E8B-5C0B-4923-AEC1-3B55202C4FBD}"/>
               </a:ext>
             </a:extLst>
           </p:cNvPr>
@@ -7656,7 +7656,7 @@
           <p:cNvPr id="39" name="">
             <a:extLst xmlns:a="http://schemas.openxmlformats.org/drawingml/2006/main">
               <a:ext uri="{FF2B5EF4-FFF2-40B4-BE49-F238E27FC236}">
-                <a16:creationId xmlns:a16="http://schemas.microsoft.com/office/drawing/2014/main" id="{A7B4F7BC-B534-4A77-9934-E4BB3520C4A1}"/>
+                <a16:creationId xmlns:a16="http://schemas.microsoft.com/office/drawing/2014/main" id="{D38CAB3D-F972-46F4-ADF5-B7B2DF32616C}"/>
               </a:ext>
             </a:extLst>
           </p:cNvPr>
@@ -7713,7 +7713,7 @@
           <p:cNvPr id="40" name="">
             <a:extLst xmlns:a="http://schemas.openxmlformats.org/drawingml/2006/main">
               <a:ext uri="{FF2B5EF4-FFF2-40B4-BE49-F238E27FC236}">
-                <a16:creationId xmlns:a16="http://schemas.microsoft.com/office/drawing/2014/main" id="{03C9A8CC-43B1-4392-AF46-14A275F3B8DD}"/>
+                <a16:creationId xmlns:a16="http://schemas.microsoft.com/office/drawing/2014/main" id="{2DD060E2-B24D-4595-9F82-3258A9ED2892}"/>
               </a:ext>
             </a:extLst>
           </p:cNvPr>
@@ -7804,7 +7804,7 @@
           <p:cNvPr id="41" name="">
             <a:extLst xmlns:a="http://schemas.openxmlformats.org/drawingml/2006/main">
               <a:ext uri="{FF2B5EF4-FFF2-40B4-BE49-F238E27FC236}">
-                <a16:creationId xmlns:a16="http://schemas.microsoft.com/office/drawing/2014/main" id="{A8A3E203-E4C1-424D-90AA-5830097C5147}"/>
+                <a16:creationId xmlns:a16="http://schemas.microsoft.com/office/drawing/2014/main" id="{48C7E22C-648E-46B4-B672-734997969A1C}"/>
               </a:ext>
             </a:extLst>
           </p:cNvPr>
@@ -7839,7 +7839,7 @@
           <p:cNvPr id="42" name="">
             <a:extLst xmlns:a="http://schemas.openxmlformats.org/drawingml/2006/main">
               <a:ext uri="{FF2B5EF4-FFF2-40B4-BE49-F238E27FC236}">
-                <a16:creationId xmlns:a16="http://schemas.microsoft.com/office/drawing/2014/main" id="{152DB913-E9C0-4631-9087-3490BBE81668}"/>
+                <a16:creationId xmlns:a16="http://schemas.microsoft.com/office/drawing/2014/main" id="{BE73C623-AEFE-47D6-BDD3-776AEBE7AB8E}"/>
               </a:ext>
             </a:extLst>
           </p:cNvPr>
@@ -7896,7 +7896,7 @@
           <p:cNvPr id="43" name="">
             <a:extLst xmlns:a="http://schemas.openxmlformats.org/drawingml/2006/main">
               <a:ext uri="{FF2B5EF4-FFF2-40B4-BE49-F238E27FC236}">
-                <a16:creationId xmlns:a16="http://schemas.microsoft.com/office/drawing/2014/main" id="{B30407E7-3828-4B93-85B6-697DCA9B44BB}"/>
+                <a16:creationId xmlns:a16="http://schemas.microsoft.com/office/drawing/2014/main" id="{6465AC89-7F8A-4FB7-91E3-B5C431B2F5E7}"/>
               </a:ext>
             </a:extLst>
           </p:cNvPr>
@@ -7987,7 +7987,7 @@
           <p:cNvPr id="44" name="">
             <a:extLst xmlns:a="http://schemas.openxmlformats.org/drawingml/2006/main">
               <a:ext uri="{FF2B5EF4-FFF2-40B4-BE49-F238E27FC236}">
-                <a16:creationId xmlns:a16="http://schemas.microsoft.com/office/drawing/2014/main" id="{F2FF0A58-5390-4ABC-B73D-F9254E1E49C1}"/>
+                <a16:creationId xmlns:a16="http://schemas.microsoft.com/office/drawing/2014/main" id="{B2244001-CF4A-4FB5-AB5C-9C4284B7EBDA}"/>
               </a:ext>
             </a:extLst>
           </p:cNvPr>
@@ -8042,7 +8042,7 @@
     </p:spTree>
     <p:extLst>
       <p:ext uri="{BB962C8B-B14F-4D97-AF65-F5344CB8AC3E}">
-        <p14:creationId xmlns:p14="http://schemas.microsoft.com/office/powerpoint/2010/main" val="1529272591"/>
+        <p14:creationId xmlns:p14="http://schemas.microsoft.com/office/powerpoint/2010/main" val="863958787"/>
       </p:ext>
     </p:extLst>
   </p:cSld>
@@ -8073,7 +8073,7 @@
           <p:cNvPr id="24" name="">
             <a:extLst xmlns:a="http://schemas.openxmlformats.org/drawingml/2006/main">
               <a:ext uri="{FF2B5EF4-FFF2-40B4-BE49-F238E27FC236}">
-                <a16:creationId xmlns:a16="http://schemas.microsoft.com/office/drawing/2014/main" id="{B4011734-FF01-4C59-8947-0F557D0F18B0}"/>
+                <a16:creationId xmlns:a16="http://schemas.microsoft.com/office/drawing/2014/main" id="{EDC443AF-D268-477E-9127-CEBDD51A6CD9}"/>
               </a:ext>
             </a:extLst>
           </p:cNvPr>
@@ -8103,7 +8103,7 @@
           <p:cNvPr id="2" name="">
             <a:extLst xmlns:a="http://schemas.openxmlformats.org/drawingml/2006/main">
               <a:ext uri="{FF2B5EF4-FFF2-40B4-BE49-F238E27FC236}">
-                <a16:creationId xmlns:a16="http://schemas.microsoft.com/office/drawing/2014/main" id="{9C6D5BA2-A3D3-4498-9C65-6769971E546C}"/>
+                <a16:creationId xmlns:a16="http://schemas.microsoft.com/office/drawing/2014/main" id="{45D4B84D-91A5-4E62-9A9D-4F3B80FC1E4D}"/>
               </a:ext>
             </a:extLst>
           </p:cNvPr>
@@ -8160,7 +8160,7 @@
           <p:cNvPr id="3" name="">
             <a:extLst xmlns:a="http://schemas.openxmlformats.org/drawingml/2006/main">
               <a:ext uri="{FF2B5EF4-FFF2-40B4-BE49-F238E27FC236}">
-                <a16:creationId xmlns:a16="http://schemas.microsoft.com/office/drawing/2014/main" id="{648E9782-4502-4D27-9B5E-B46F321C968F}"/>
+                <a16:creationId xmlns:a16="http://schemas.microsoft.com/office/drawing/2014/main" id="{F5F5EC85-B79D-4E40-AC0B-F9FDAB983D0E}"/>
               </a:ext>
             </a:extLst>
           </p:cNvPr>
@@ -8217,7 +8217,7 @@
           <p:cNvPr id="4" name="">
             <a:extLst xmlns:a="http://schemas.openxmlformats.org/drawingml/2006/main">
               <a:ext uri="{FF2B5EF4-FFF2-40B4-BE49-F238E27FC236}">
-                <a16:creationId xmlns:a16="http://schemas.microsoft.com/office/drawing/2014/main" id="{34652470-7A1B-49BF-8406-CE9834772DF9}"/>
+                <a16:creationId xmlns:a16="http://schemas.microsoft.com/office/drawing/2014/main" id="{ECC93620-5A79-4458-AA50-276892A37DD0}"/>
               </a:ext>
             </a:extLst>
           </p:cNvPr>
@@ -8274,7 +8274,7 @@
           <p:cNvPr id="5" name="">
             <a:extLst xmlns:a="http://schemas.openxmlformats.org/drawingml/2006/main">
               <a:ext uri="{FF2B5EF4-FFF2-40B4-BE49-F238E27FC236}">
-                <a16:creationId xmlns:a16="http://schemas.microsoft.com/office/drawing/2014/main" id="{994F014E-6DBB-4A8F-8296-9F65D3746ED5}"/>
+                <a16:creationId xmlns:a16="http://schemas.microsoft.com/office/drawing/2014/main" id="{A26AC679-C8D5-4EC5-B6E8-47EE106B1D41}"/>
               </a:ext>
             </a:extLst>
           </p:cNvPr>
@@ -8331,7 +8331,7 @@
           <p:cNvPr id="6" name="">
             <a:extLst xmlns:a="http://schemas.openxmlformats.org/drawingml/2006/main">
               <a:ext uri="{FF2B5EF4-FFF2-40B4-BE49-F238E27FC236}">
-                <a16:creationId xmlns:a16="http://schemas.microsoft.com/office/drawing/2014/main" id="{5D198482-03A3-4740-B150-D1D4BE98666F}"/>
+                <a16:creationId xmlns:a16="http://schemas.microsoft.com/office/drawing/2014/main" id="{78EE4808-9F79-432F-8CDE-85E4C411C7BC}"/>
               </a:ext>
             </a:extLst>
           </p:cNvPr>
@@ -8388,7 +8388,7 @@
           <p:cNvPr id="7" name="">
             <a:extLst xmlns:a="http://schemas.openxmlformats.org/drawingml/2006/main">
               <a:ext uri="{FF2B5EF4-FFF2-40B4-BE49-F238E27FC236}">
-                <a16:creationId xmlns:a16="http://schemas.microsoft.com/office/drawing/2014/main" id="{6CEE3BCB-F93D-47A0-8110-8EFE358047A0}"/>
+                <a16:creationId xmlns:a16="http://schemas.microsoft.com/office/drawing/2014/main" id="{BA30F692-DA33-4BA1-A3D0-12D8F4A584B0}"/>
               </a:ext>
             </a:extLst>
           </p:cNvPr>
@@ -8445,7 +8445,7 @@
           <p:cNvPr id="8" name="">
             <a:extLst xmlns:a="http://schemas.openxmlformats.org/drawingml/2006/main">
               <a:ext uri="{FF2B5EF4-FFF2-40B4-BE49-F238E27FC236}">
-                <a16:creationId xmlns:a16="http://schemas.microsoft.com/office/drawing/2014/main" id="{00AF946C-709E-4F9E-9C83-3E29331BF907}"/>
+                <a16:creationId xmlns:a16="http://schemas.microsoft.com/office/drawing/2014/main" id="{394C0CC1-6598-45E6-A21E-78A7E1304136}"/>
               </a:ext>
             </a:extLst>
           </p:cNvPr>
@@ -8502,7 +8502,7 @@
           <p:cNvPr id="9" name="">
             <a:extLst xmlns:a="http://schemas.openxmlformats.org/drawingml/2006/main">
               <a:ext uri="{FF2B5EF4-FFF2-40B4-BE49-F238E27FC236}">
-                <a16:creationId xmlns:a16="http://schemas.microsoft.com/office/drawing/2014/main" id="{6CEF9B13-6E26-4310-AE9E-39E165F49E9F}"/>
+                <a16:creationId xmlns:a16="http://schemas.microsoft.com/office/drawing/2014/main" id="{6C5A963A-8DF2-4D68-BC3C-8F8DA1E5D041}"/>
               </a:ext>
             </a:extLst>
           </p:cNvPr>
@@ -8559,7 +8559,7 @@
           <p:cNvPr id="10" name="">
             <a:extLst xmlns:a="http://schemas.openxmlformats.org/drawingml/2006/main">
               <a:ext uri="{FF2B5EF4-FFF2-40B4-BE49-F238E27FC236}">
-                <a16:creationId xmlns:a16="http://schemas.microsoft.com/office/drawing/2014/main" id="{060FF20D-E04D-4E96-B18C-4BFBB214E34A}"/>
+                <a16:creationId xmlns:a16="http://schemas.microsoft.com/office/drawing/2014/main" id="{311A02E3-E13E-4514-87EB-1FC7FCFCCA11}"/>
               </a:ext>
             </a:extLst>
           </p:cNvPr>
@@ -8616,7 +8616,7 @@
           <p:cNvPr id="11" name="">
             <a:extLst xmlns:a="http://schemas.openxmlformats.org/drawingml/2006/main">
               <a:ext uri="{FF2B5EF4-FFF2-40B4-BE49-F238E27FC236}">
-                <a16:creationId xmlns:a16="http://schemas.microsoft.com/office/drawing/2014/main" id="{B3932DC8-3C54-4FC3-8C3A-5B54A48736E0}"/>
+                <a16:creationId xmlns:a16="http://schemas.microsoft.com/office/drawing/2014/main" id="{1FA75284-E3C7-4C08-AB4E-C2EADF667657}"/>
               </a:ext>
             </a:extLst>
           </p:cNvPr>
@@ -8673,7 +8673,7 @@
           <p:cNvPr id="12" name="">
             <a:extLst xmlns:a="http://schemas.openxmlformats.org/drawingml/2006/main">
               <a:ext uri="{FF2B5EF4-FFF2-40B4-BE49-F238E27FC236}">
-                <a16:creationId xmlns:a16="http://schemas.microsoft.com/office/drawing/2014/main" id="{7B2FF1D0-FF7F-4EF6-828E-96AE8836AC50}"/>
+                <a16:creationId xmlns:a16="http://schemas.microsoft.com/office/drawing/2014/main" id="{23C52DA7-B33F-421E-BC6E-F4BAD056B00A}"/>
               </a:ext>
             </a:extLst>
           </p:cNvPr>
@@ -8730,7 +8730,7 @@
           <p:cNvPr id="13" name="">
             <a:extLst xmlns:a="http://schemas.openxmlformats.org/drawingml/2006/main">
               <a:ext uri="{FF2B5EF4-FFF2-40B4-BE49-F238E27FC236}">
-                <a16:creationId xmlns:a16="http://schemas.microsoft.com/office/drawing/2014/main" id="{424751C4-B640-404D-952C-E559A6711E67}"/>
+                <a16:creationId xmlns:a16="http://schemas.microsoft.com/office/drawing/2014/main" id="{F5B813FC-79C1-451A-B0E1-B3A174B9877A}"/>
               </a:ext>
             </a:extLst>
           </p:cNvPr>
@@ -8760,7 +8760,7 @@
           <p:cNvPr id="14" name="">
             <a:extLst xmlns:a="http://schemas.openxmlformats.org/drawingml/2006/main">
               <a:ext uri="{FF2B5EF4-FFF2-40B4-BE49-F238E27FC236}">
-                <a16:creationId xmlns:a16="http://schemas.microsoft.com/office/drawing/2014/main" id="{DF4E5205-C023-418E-9E9E-757F4749FE2B}"/>
+                <a16:creationId xmlns:a16="http://schemas.microsoft.com/office/drawing/2014/main" id="{D92379D4-A0FB-418B-A028-BBB9B256A9A1}"/>
               </a:ext>
             </a:extLst>
           </p:cNvPr>
@@ -8817,7 +8817,7 @@
           <p:cNvPr id="15" name="">
             <a:extLst xmlns:a="http://schemas.openxmlformats.org/drawingml/2006/main">
               <a:ext uri="{FF2B5EF4-FFF2-40B4-BE49-F238E27FC236}">
-                <a16:creationId xmlns:a16="http://schemas.microsoft.com/office/drawing/2014/main" id="{CC66281D-E778-4DC8-ACDC-C024D9438CF2}"/>
+                <a16:creationId xmlns:a16="http://schemas.microsoft.com/office/drawing/2014/main" id="{751BCAAE-15D1-4D45-9C21-ABE23E6DF225}"/>
               </a:ext>
             </a:extLst>
           </p:cNvPr>
@@ -8874,7 +8874,7 @@
           <p:cNvPr id="16" name="">
             <a:extLst xmlns:a="http://schemas.openxmlformats.org/drawingml/2006/main">
               <a:ext uri="{FF2B5EF4-FFF2-40B4-BE49-F238E27FC236}">
-                <a16:creationId xmlns:a16="http://schemas.microsoft.com/office/drawing/2014/main" id="{FC7BA86F-83D6-4DBB-8A3A-79EFD2D5E601}"/>
+                <a16:creationId xmlns:a16="http://schemas.microsoft.com/office/drawing/2014/main" id="{7B5DCAA1-337F-4B93-8F68-32A2C6CCFCED}"/>
               </a:ext>
             </a:extLst>
           </p:cNvPr>
@@ -8931,7 +8931,7 @@
           <p:cNvPr id="17" name="">
             <a:extLst xmlns:a="http://schemas.openxmlformats.org/drawingml/2006/main">
               <a:ext uri="{FF2B5EF4-FFF2-40B4-BE49-F238E27FC236}">
-                <a16:creationId xmlns:a16="http://schemas.microsoft.com/office/drawing/2014/main" id="{628D925D-C5F9-44E9-82BA-1346071AA7D9}"/>
+                <a16:creationId xmlns:a16="http://schemas.microsoft.com/office/drawing/2014/main" id="{3EE80051-8DC0-40B5-B5CE-8E860D160B95}"/>
               </a:ext>
             </a:extLst>
           </p:cNvPr>
@@ -8988,7 +8988,7 @@
           <p:cNvPr id="18" name="">
             <a:extLst xmlns:a="http://schemas.openxmlformats.org/drawingml/2006/main">
               <a:ext uri="{FF2B5EF4-FFF2-40B4-BE49-F238E27FC236}">
-                <a16:creationId xmlns:a16="http://schemas.microsoft.com/office/drawing/2014/main" id="{BE26A07A-6FF6-46B9-8B07-8C7636F47C1E}"/>
+                <a16:creationId xmlns:a16="http://schemas.microsoft.com/office/drawing/2014/main" id="{3E2AD71A-4F42-4931-92DF-7CADE1A6A716}"/>
               </a:ext>
             </a:extLst>
           </p:cNvPr>
@@ -9045,7 +9045,7 @@
           <p:cNvPr id="19" name="">
             <a:extLst xmlns:a="http://schemas.openxmlformats.org/drawingml/2006/main">
               <a:ext uri="{FF2B5EF4-FFF2-40B4-BE49-F238E27FC236}">
-                <a16:creationId xmlns:a16="http://schemas.microsoft.com/office/drawing/2014/main" id="{6D28081E-79E3-4894-A2E8-8E0B504023AF}"/>
+                <a16:creationId xmlns:a16="http://schemas.microsoft.com/office/drawing/2014/main" id="{50BB15CF-ABD4-41BC-8D68-1D4976B85A05}"/>
               </a:ext>
             </a:extLst>
           </p:cNvPr>
@@ -9102,7 +9102,7 @@
           <p:cNvPr id="20" name="">
             <a:extLst xmlns:a="http://schemas.openxmlformats.org/drawingml/2006/main">
               <a:ext uri="{FF2B5EF4-FFF2-40B4-BE49-F238E27FC236}">
-                <a16:creationId xmlns:a16="http://schemas.microsoft.com/office/drawing/2014/main" id="{F272E5E6-5902-4536-A4C8-3AACC7C5CAF3}"/>
+                <a16:creationId xmlns:a16="http://schemas.microsoft.com/office/drawing/2014/main" id="{B21BA7AB-E265-4B53-BBDC-88537447AB92}"/>
               </a:ext>
             </a:extLst>
           </p:cNvPr>
@@ -9137,7 +9137,7 @@
           <p:cNvPr id="21" name="">
             <a:extLst xmlns:a="http://schemas.openxmlformats.org/drawingml/2006/main">
               <a:ext uri="{FF2B5EF4-FFF2-40B4-BE49-F238E27FC236}">
-                <a16:creationId xmlns:a16="http://schemas.microsoft.com/office/drawing/2014/main" id="{832B32B1-810E-4F35-BDD4-AF498F1821EF}"/>
+                <a16:creationId xmlns:a16="http://schemas.microsoft.com/office/drawing/2014/main" id="{7FD23BF8-3470-4C34-B020-B099B053075D}"/>
               </a:ext>
             </a:extLst>
           </p:cNvPr>
@@ -9194,7 +9194,7 @@
           <p:cNvPr id="22" name="">
             <a:extLst xmlns:a="http://schemas.openxmlformats.org/drawingml/2006/main">
               <a:ext uri="{FF2B5EF4-FFF2-40B4-BE49-F238E27FC236}">
-                <a16:creationId xmlns:a16="http://schemas.microsoft.com/office/drawing/2014/main" id="{5562878E-4280-4BA1-8409-E82E68A618B6}"/>
+                <a16:creationId xmlns:a16="http://schemas.microsoft.com/office/drawing/2014/main" id="{C4B0865D-9CBF-46F7-9322-39559555866F}"/>
               </a:ext>
             </a:extLst>
           </p:cNvPr>
@@ -9251,7 +9251,7 @@
           <p:cNvPr id="23" name="">
             <a:extLst xmlns:a="http://schemas.openxmlformats.org/drawingml/2006/main">
               <a:ext uri="{FF2B5EF4-FFF2-40B4-BE49-F238E27FC236}">
-                <a16:creationId xmlns:a16="http://schemas.microsoft.com/office/drawing/2014/main" id="{8FDABB89-6082-4548-A3CB-D71783F1A189}"/>
+                <a16:creationId xmlns:a16="http://schemas.microsoft.com/office/drawing/2014/main" id="{42857999-9D99-4778-B553-D78504AC9530}"/>
               </a:ext>
             </a:extLst>
           </p:cNvPr>
@@ -9306,7 +9306,7 @@
     </p:spTree>
     <p:extLst>
       <p:ext uri="{BB962C8B-B14F-4D97-AF65-F5344CB8AC3E}">
-        <p14:creationId xmlns:p14="http://schemas.microsoft.com/office/powerpoint/2010/main" val="359539880"/>
+        <p14:creationId xmlns:p14="http://schemas.microsoft.com/office/powerpoint/2010/main" val="1544751373"/>
       </p:ext>
     </p:extLst>
   </p:cSld>
@@ -9337,7 +9337,7 @@
           <p:cNvPr id="7" name="">
             <a:extLst xmlns:a="http://schemas.openxmlformats.org/drawingml/2006/main">
               <a:ext uri="{FF2B5EF4-FFF2-40B4-BE49-F238E27FC236}">
-                <a16:creationId xmlns:a16="http://schemas.microsoft.com/office/drawing/2014/main" id="{E961545C-E96E-4175-BE12-421C4417259B}"/>
+                <a16:creationId xmlns:a16="http://schemas.microsoft.com/office/drawing/2014/main" id="{A5DB17D8-15BB-4228-8485-C170C4A9909D}"/>
               </a:ext>
             </a:extLst>
           </p:cNvPr>
@@ -9367,7 +9367,7 @@
           <p:cNvPr id="2" name="">
             <a:extLst xmlns:a="http://schemas.openxmlformats.org/drawingml/2006/main">
               <a:ext uri="{FF2B5EF4-FFF2-40B4-BE49-F238E27FC236}">
-                <a16:creationId xmlns:a16="http://schemas.microsoft.com/office/drawing/2014/main" id="{60900772-0247-46E9-8292-2A82CD8A374E}"/>
+                <a16:creationId xmlns:a16="http://schemas.microsoft.com/office/drawing/2014/main" id="{F829AF17-7272-406F-81C1-D99A0ADE7034}"/>
               </a:ext>
             </a:extLst>
           </p:cNvPr>
@@ -9424,7 +9424,7 @@
           <p:cNvPr id="3" name="">
             <a:extLst xmlns:a="http://schemas.openxmlformats.org/drawingml/2006/main">
               <a:ext uri="{FF2B5EF4-FFF2-40B4-BE49-F238E27FC236}">
-                <a16:creationId xmlns:a16="http://schemas.microsoft.com/office/drawing/2014/main" id="{EA8CE6DD-11E6-443E-8F45-9B25059127E8}"/>
+                <a16:creationId xmlns:a16="http://schemas.microsoft.com/office/drawing/2014/main" id="{F66F82EE-BAD2-4EE8-B263-FE29CB109EE6}"/>
               </a:ext>
             </a:extLst>
           </p:cNvPr>
@@ -9481,7 +9481,7 @@
           <p:cNvPr id="4" name="">
             <a:extLst xmlns:a="http://schemas.openxmlformats.org/drawingml/2006/main">
               <a:ext uri="{FF2B5EF4-FFF2-40B4-BE49-F238E27FC236}">
-                <a16:creationId xmlns:a16="http://schemas.microsoft.com/office/drawing/2014/main" id="{940A3B9B-27FF-43E2-B6C8-DAC015A46ABF}"/>
+                <a16:creationId xmlns:a16="http://schemas.microsoft.com/office/drawing/2014/main" id="{E19F643D-080D-474D-8982-17FFCF8D411B}"/>
               </a:ext>
             </a:extLst>
           </p:cNvPr>
@@ -9538,7 +9538,7 @@
           <p:cNvPr id="5" name="">
             <a:extLst xmlns:a="http://schemas.openxmlformats.org/drawingml/2006/main">
               <a:ext uri="{FF2B5EF4-FFF2-40B4-BE49-F238E27FC236}">
-                <a16:creationId xmlns:a16="http://schemas.microsoft.com/office/drawing/2014/main" id="{F9630089-A8B2-48F8-AF2F-FDEA3B7D4802}"/>
+                <a16:creationId xmlns:a16="http://schemas.microsoft.com/office/drawing/2014/main" id="{4DD3801E-C639-4ADD-8A83-96DE0F013E06}"/>
               </a:ext>
             </a:extLst>
           </p:cNvPr>
@@ -11686,7 +11686,7 @@
           <p:cNvPr id="6" name="">
             <a:extLst xmlns:a="http://schemas.openxmlformats.org/drawingml/2006/main">
               <a:ext uri="{FF2B5EF4-FFF2-40B4-BE49-F238E27FC236}">
-                <a16:creationId xmlns:a16="http://schemas.microsoft.com/office/drawing/2014/main" id="{A62B60BB-A7C2-424A-98CA-6D48C62C65B1}"/>
+                <a16:creationId xmlns:a16="http://schemas.microsoft.com/office/drawing/2014/main" id="{8FA0F56D-14EC-4F1A-8956-45CD16435B13}"/>
               </a:ext>
             </a:extLst>
           </p:cNvPr>
@@ -11741,7 +11741,7 @@
     </p:spTree>
     <p:extLst>
       <p:ext uri="{BB962C8B-B14F-4D97-AF65-F5344CB8AC3E}">
-        <p14:creationId xmlns:p14="http://schemas.microsoft.com/office/powerpoint/2010/main" val="1933130232"/>
+        <p14:creationId xmlns:p14="http://schemas.microsoft.com/office/powerpoint/2010/main" val="1093580521"/>
       </p:ext>
     </p:extLst>
   </p:cSld>
@@ -11772,7 +11772,7 @@
           <p:cNvPr id="23" name="">
             <a:extLst xmlns:a="http://schemas.openxmlformats.org/drawingml/2006/main">
               <a:ext uri="{FF2B5EF4-FFF2-40B4-BE49-F238E27FC236}">
-                <a16:creationId xmlns:a16="http://schemas.microsoft.com/office/drawing/2014/main" id="{E40E5013-30AE-4369-B5E0-DAC18F29EB1D}"/>
+                <a16:creationId xmlns:a16="http://schemas.microsoft.com/office/drawing/2014/main" id="{13E9A30D-E9AF-4E82-9746-B63B00587BCF}"/>
               </a:ext>
             </a:extLst>
           </p:cNvPr>
@@ -11802,7 +11802,7 @@
           <p:cNvPr id="2" name="">
             <a:extLst xmlns:a="http://schemas.openxmlformats.org/drawingml/2006/main">
               <a:ext uri="{FF2B5EF4-FFF2-40B4-BE49-F238E27FC236}">
-                <a16:creationId xmlns:a16="http://schemas.microsoft.com/office/drawing/2014/main" id="{3CBAB3FC-C78D-41E2-9262-F39CEABCA854}"/>
+                <a16:creationId xmlns:a16="http://schemas.microsoft.com/office/drawing/2014/main" id="{C604587E-29BA-464B-9454-89B5D8F1A3DC}"/>
               </a:ext>
             </a:extLst>
           </p:cNvPr>
@@ -11859,7 +11859,7 @@
           <p:cNvPr id="3" name="">
             <a:extLst xmlns:a="http://schemas.openxmlformats.org/drawingml/2006/main">
               <a:ext uri="{FF2B5EF4-FFF2-40B4-BE49-F238E27FC236}">
-                <a16:creationId xmlns:a16="http://schemas.microsoft.com/office/drawing/2014/main" id="{46057232-B0DA-4DCA-A9DC-36B5774FB8D5}"/>
+                <a16:creationId xmlns:a16="http://schemas.microsoft.com/office/drawing/2014/main" id="{4D1F37EC-1D01-4679-A885-DCA1D51ED4FA}"/>
               </a:ext>
             </a:extLst>
           </p:cNvPr>
@@ -11916,7 +11916,7 @@
           <p:cNvPr id="4" name="">
             <a:extLst xmlns:a="http://schemas.openxmlformats.org/drawingml/2006/main">
               <a:ext uri="{FF2B5EF4-FFF2-40B4-BE49-F238E27FC236}">
-                <a16:creationId xmlns:a16="http://schemas.microsoft.com/office/drawing/2014/main" id="{FB25A429-ED0F-453A-8DC8-E34B950EEB7C}"/>
+                <a16:creationId xmlns:a16="http://schemas.microsoft.com/office/drawing/2014/main" id="{D9F0F273-C33E-420A-8859-97952EEC9D4C}"/>
               </a:ext>
             </a:extLst>
           </p:cNvPr>
@@ -11973,7 +11973,7 @@
           <p:cNvPr id="5" name="">
             <a:extLst xmlns:a="http://schemas.openxmlformats.org/drawingml/2006/main">
               <a:ext uri="{FF2B5EF4-FFF2-40B4-BE49-F238E27FC236}">
-                <a16:creationId xmlns:a16="http://schemas.microsoft.com/office/drawing/2014/main" id="{8CCA93C5-4EE7-46F4-ADA2-8D44108FA6FE}"/>
+                <a16:creationId xmlns:a16="http://schemas.microsoft.com/office/drawing/2014/main" id="{93C3FFAF-A4EA-40AE-961D-DFFD9A56CA40}"/>
               </a:ext>
             </a:extLst>
           </p:cNvPr>
@@ -12008,7 +12008,7 @@
           <p:cNvPr id="6" name="">
             <a:extLst xmlns:a="http://schemas.openxmlformats.org/drawingml/2006/main">
               <a:ext uri="{FF2B5EF4-FFF2-40B4-BE49-F238E27FC236}">
-                <a16:creationId xmlns:a16="http://schemas.microsoft.com/office/drawing/2014/main" id="{3132B8A0-4612-4070-A1CF-5E748F32D0FE}"/>
+                <a16:creationId xmlns:a16="http://schemas.microsoft.com/office/drawing/2014/main" id="{E1B99AFA-38BF-4294-969A-841CE08975FB}"/>
               </a:ext>
             </a:extLst>
           </p:cNvPr>
@@ -12038,7 +12038,7 @@
           <p:cNvPr id="7" name="">
             <a:extLst xmlns:a="http://schemas.openxmlformats.org/drawingml/2006/main">
               <a:ext uri="{FF2B5EF4-FFF2-40B4-BE49-F238E27FC236}">
-                <a16:creationId xmlns:a16="http://schemas.microsoft.com/office/drawing/2014/main" id="{DA17887B-6AC9-44D9-8701-1CDFD4DA73EF}"/>
+                <a16:creationId xmlns:a16="http://schemas.microsoft.com/office/drawing/2014/main" id="{CEA4C805-2925-4A05-8974-95117565BB31}"/>
               </a:ext>
             </a:extLst>
           </p:cNvPr>
@@ -12095,7 +12095,7 @@
           <p:cNvPr id="8" name="">
             <a:extLst xmlns:a="http://schemas.openxmlformats.org/drawingml/2006/main">
               <a:ext uri="{FF2B5EF4-FFF2-40B4-BE49-F238E27FC236}">
-                <a16:creationId xmlns:a16="http://schemas.microsoft.com/office/drawing/2014/main" id="{13EEC128-C177-4E44-955F-7A4992738151}"/>
+                <a16:creationId xmlns:a16="http://schemas.microsoft.com/office/drawing/2014/main" id="{F9E89F36-DDD8-40F2-89BD-7B1333CB988B}"/>
               </a:ext>
             </a:extLst>
           </p:cNvPr>
@@ -12169,7 +12169,7 @@
           <p:cNvPr id="9" name="">
             <a:extLst xmlns:a="http://schemas.openxmlformats.org/drawingml/2006/main">
               <a:ext uri="{FF2B5EF4-FFF2-40B4-BE49-F238E27FC236}">
-                <a16:creationId xmlns:a16="http://schemas.microsoft.com/office/drawing/2014/main" id="{858B4251-9721-4C04-BBD3-E26754DB85E3}"/>
+                <a16:creationId xmlns:a16="http://schemas.microsoft.com/office/drawing/2014/main" id="{E3FBF88F-FE49-4F9B-AC55-E313884DF651}"/>
               </a:ext>
             </a:extLst>
           </p:cNvPr>
@@ -12204,7 +12204,7 @@
           <p:cNvPr id="10" name="">
             <a:extLst xmlns:a="http://schemas.openxmlformats.org/drawingml/2006/main">
               <a:ext uri="{FF2B5EF4-FFF2-40B4-BE49-F238E27FC236}">
-                <a16:creationId xmlns:a16="http://schemas.microsoft.com/office/drawing/2014/main" id="{AAB4558D-DF2D-4577-9E65-B9C6BEBF5EEB}"/>
+                <a16:creationId xmlns:a16="http://schemas.microsoft.com/office/drawing/2014/main" id="{6E2E19AF-A9C3-414C-A2C0-3033CA78F71B}"/>
               </a:ext>
             </a:extLst>
           </p:cNvPr>
@@ -12234,7 +12234,7 @@
           <p:cNvPr id="11" name="">
             <a:extLst xmlns:a="http://schemas.openxmlformats.org/drawingml/2006/main">
               <a:ext uri="{FF2B5EF4-FFF2-40B4-BE49-F238E27FC236}">
-                <a16:creationId xmlns:a16="http://schemas.microsoft.com/office/drawing/2014/main" id="{ABAF8127-4296-4E93-86B4-B5A4CD36076C}"/>
+                <a16:creationId xmlns:a16="http://schemas.microsoft.com/office/drawing/2014/main" id="{E53A1B9A-D3FE-4DED-92C1-45477B5D478F}"/>
               </a:ext>
             </a:extLst>
           </p:cNvPr>
@@ -12291,7 +12291,7 @@
           <p:cNvPr id="12" name="">
             <a:extLst xmlns:a="http://schemas.openxmlformats.org/drawingml/2006/main">
               <a:ext uri="{FF2B5EF4-FFF2-40B4-BE49-F238E27FC236}">
-                <a16:creationId xmlns:a16="http://schemas.microsoft.com/office/drawing/2014/main" id="{BDDE7D24-0E93-475E-BEAF-3AA04863FC7A}"/>
+                <a16:creationId xmlns:a16="http://schemas.microsoft.com/office/drawing/2014/main" id="{B1FB28EB-3707-4D3E-8A28-6309E2FD2759}"/>
               </a:ext>
             </a:extLst>
           </p:cNvPr>
@@ -12365,7 +12365,7 @@
           <p:cNvPr id="13" name="">
             <a:extLst xmlns:a="http://schemas.openxmlformats.org/drawingml/2006/main">
               <a:ext uri="{FF2B5EF4-FFF2-40B4-BE49-F238E27FC236}">
-                <a16:creationId xmlns:a16="http://schemas.microsoft.com/office/drawing/2014/main" id="{5375CD36-E131-4963-B398-FF8A85CB17A6}"/>
+                <a16:creationId xmlns:a16="http://schemas.microsoft.com/office/drawing/2014/main" id="{657AC8F0-D004-43D5-A585-92208D79440D}"/>
               </a:ext>
             </a:extLst>
           </p:cNvPr>
@@ -12400,7 +12400,7 @@
           <p:cNvPr id="14" name="">
             <a:extLst xmlns:a="http://schemas.openxmlformats.org/drawingml/2006/main">
               <a:ext uri="{FF2B5EF4-FFF2-40B4-BE49-F238E27FC236}">
-                <a16:creationId xmlns:a16="http://schemas.microsoft.com/office/drawing/2014/main" id="{122708DF-8983-49C6-AE26-84D7B4A61918}"/>
+                <a16:creationId xmlns:a16="http://schemas.microsoft.com/office/drawing/2014/main" id="{3FEE280B-53F0-4649-9397-8AE41C9DBABD}"/>
               </a:ext>
             </a:extLst>
           </p:cNvPr>
@@ -12430,7 +12430,7 @@
           <p:cNvPr id="15" name="">
             <a:extLst xmlns:a="http://schemas.openxmlformats.org/drawingml/2006/main">
               <a:ext uri="{FF2B5EF4-FFF2-40B4-BE49-F238E27FC236}">
-                <a16:creationId xmlns:a16="http://schemas.microsoft.com/office/drawing/2014/main" id="{821A956E-8B8D-4E01-85D3-0EDC47575890}"/>
+                <a16:creationId xmlns:a16="http://schemas.microsoft.com/office/drawing/2014/main" id="{F7F97036-1828-44AE-B5C5-08A940908958}"/>
               </a:ext>
             </a:extLst>
           </p:cNvPr>
@@ -12487,7 +12487,7 @@
           <p:cNvPr id="16" name="">
             <a:extLst xmlns:a="http://schemas.openxmlformats.org/drawingml/2006/main">
               <a:ext uri="{FF2B5EF4-FFF2-40B4-BE49-F238E27FC236}">
-                <a16:creationId xmlns:a16="http://schemas.microsoft.com/office/drawing/2014/main" id="{92379C71-03A2-4FE4-8132-E820D4AB2B90}"/>
+                <a16:creationId xmlns:a16="http://schemas.microsoft.com/office/drawing/2014/main" id="{24A79E0C-D89E-4D73-869B-F8909C8FFD32}"/>
               </a:ext>
             </a:extLst>
           </p:cNvPr>
@@ -12561,7 +12561,7 @@
           <p:cNvPr id="17" name="">
             <a:extLst xmlns:a="http://schemas.openxmlformats.org/drawingml/2006/main">
               <a:ext uri="{FF2B5EF4-FFF2-40B4-BE49-F238E27FC236}">
-                <a16:creationId xmlns:a16="http://schemas.microsoft.com/office/drawing/2014/main" id="{840032D5-CCF1-404D-91BC-222A191F037A}"/>
+                <a16:creationId xmlns:a16="http://schemas.microsoft.com/office/drawing/2014/main" id="{C60E1519-AE2B-45CA-B873-CF6F4D99966E}"/>
               </a:ext>
             </a:extLst>
           </p:cNvPr>
@@ -12596,7 +12596,7 @@
           <p:cNvPr id="18" name="">
             <a:extLst xmlns:a="http://schemas.openxmlformats.org/drawingml/2006/main">
               <a:ext uri="{FF2B5EF4-FFF2-40B4-BE49-F238E27FC236}">
-                <a16:creationId xmlns:a16="http://schemas.microsoft.com/office/drawing/2014/main" id="{0B31F638-CEE9-4570-9D36-0A90CDD29875}"/>
+                <a16:creationId xmlns:a16="http://schemas.microsoft.com/office/drawing/2014/main" id="{418694C6-0074-423E-89B4-0C63EF7BCE7F}"/>
               </a:ext>
             </a:extLst>
           </p:cNvPr>
@@ -12626,7 +12626,7 @@
           <p:cNvPr id="19" name="">
             <a:extLst xmlns:a="http://schemas.openxmlformats.org/drawingml/2006/main">
               <a:ext uri="{FF2B5EF4-FFF2-40B4-BE49-F238E27FC236}">
-                <a16:creationId xmlns:a16="http://schemas.microsoft.com/office/drawing/2014/main" id="{44EE7279-E2DF-4ACA-A6CA-1C061824FEF7}"/>
+                <a16:creationId xmlns:a16="http://schemas.microsoft.com/office/drawing/2014/main" id="{79478F83-4A03-46F5-991B-842F1AE2A9E2}"/>
               </a:ext>
             </a:extLst>
           </p:cNvPr>
@@ -12683,7 +12683,7 @@
           <p:cNvPr id="20" name="">
             <a:extLst xmlns:a="http://schemas.openxmlformats.org/drawingml/2006/main">
               <a:ext uri="{FF2B5EF4-FFF2-40B4-BE49-F238E27FC236}">
-                <a16:creationId xmlns:a16="http://schemas.microsoft.com/office/drawing/2014/main" id="{C2A2A79C-8B92-4E32-A744-F221466695ED}"/>
+                <a16:creationId xmlns:a16="http://schemas.microsoft.com/office/drawing/2014/main" id="{D240465B-A3CA-4D32-96EA-11A63548C2EA}"/>
               </a:ext>
             </a:extLst>
           </p:cNvPr>
@@ -12740,7 +12740,7 @@
           <p:cNvPr id="21" name="">
             <a:extLst xmlns:a="http://schemas.openxmlformats.org/drawingml/2006/main">
               <a:ext uri="{FF2B5EF4-FFF2-40B4-BE49-F238E27FC236}">
-                <a16:creationId xmlns:a16="http://schemas.microsoft.com/office/drawing/2014/main" id="{5521421C-9EEB-4F82-8059-B59F1D17FEDB}"/>
+                <a16:creationId xmlns:a16="http://schemas.microsoft.com/office/drawing/2014/main" id="{07B51AD0-C49F-410B-8BC1-35C56A932E79}"/>
               </a:ext>
             </a:extLst>
           </p:cNvPr>
@@ -12775,7 +12775,7 @@
           <p:cNvPr id="22" name="">
             <a:extLst xmlns:a="http://schemas.openxmlformats.org/drawingml/2006/main">
               <a:ext uri="{FF2B5EF4-FFF2-40B4-BE49-F238E27FC236}">
-                <a16:creationId xmlns:a16="http://schemas.microsoft.com/office/drawing/2014/main" id="{2AD7F6B7-A091-4064-9E8D-F391DB51284C}"/>
+                <a16:creationId xmlns:a16="http://schemas.microsoft.com/office/drawing/2014/main" id="{850A3F9C-592D-485E-A70A-9D5B7A43987E}"/>
               </a:ext>
             </a:extLst>
           </p:cNvPr>
@@ -12830,7 +12830,7 @@
     </p:spTree>
     <p:extLst>
       <p:ext uri="{BB962C8B-B14F-4D97-AF65-F5344CB8AC3E}">
-        <p14:creationId xmlns:p14="http://schemas.microsoft.com/office/powerpoint/2010/main" val="507696984"/>
+        <p14:creationId xmlns:p14="http://schemas.microsoft.com/office/powerpoint/2010/main" val="1899652402"/>
       </p:ext>
     </p:extLst>
   </p:cSld>
